--- a/output/slides/Group4_VariantB_End_to_End_AI_System_Design.pptx
+++ b/output/slides/Group4_VariantB_End_to_End_AI_System_Design.pptx
@@ -2,20 +2,20 @@
 <file path=ppt/presentation.xml><?xml version="1.0" encoding="utf-8"?>
 <p:presentation xmlns:p="http://schemas.openxmlformats.org/presentationml/2006/main">
   <p:sldMasterIdLst>
-    <p:sldMasterId xmlns:r="http://schemas.openxmlformats.org/officeDocument/2006/relationships" id="2147483648" r:id="R15ced374b0bf4718"/>
+    <p:sldMasterId xmlns:r="http://schemas.openxmlformats.org/officeDocument/2006/relationships" id="2147483648" r:id="Rb86abda8a3db4b92"/>
   </p:sldMasterIdLst>
   <p:notesMasterIdLst>
-    <p:notesMasterId xmlns:r="http://schemas.openxmlformats.org/officeDocument/2006/relationships" r:id="R8410a6c3301f4255"/>
+    <p:notesMasterId xmlns:r="http://schemas.openxmlformats.org/officeDocument/2006/relationships" r:id="R55819a513c884621"/>
   </p:notesMasterIdLst>
   <p:sldIdLst>
-    <p:sldId xmlns:r="http://schemas.openxmlformats.org/officeDocument/2006/relationships" id="256" r:id="Rf06c630c38f2480b"/>
-    <p:sldId xmlns:r="http://schemas.openxmlformats.org/officeDocument/2006/relationships" id="257" r:id="Rfbcd2c0239ab4e1b"/>
-    <p:sldId xmlns:r="http://schemas.openxmlformats.org/officeDocument/2006/relationships" id="258" r:id="Ra5fa097e059a4eed"/>
-    <p:sldId xmlns:r="http://schemas.openxmlformats.org/officeDocument/2006/relationships" id="259" r:id="Ref5f8e59b80a41ff"/>
-    <p:sldId xmlns:r="http://schemas.openxmlformats.org/officeDocument/2006/relationships" id="260" r:id="R4402f32dbec3461d"/>
-    <p:sldId xmlns:r="http://schemas.openxmlformats.org/officeDocument/2006/relationships" id="261" r:id="R1440d37648a84c1c"/>
-    <p:sldId xmlns:r="http://schemas.openxmlformats.org/officeDocument/2006/relationships" id="262" r:id="R6721a21b2f044166"/>
-    <p:sldId xmlns:r="http://schemas.openxmlformats.org/officeDocument/2006/relationships" id="263" r:id="Rfdc64df6cad54af0"/>
+    <p:sldId xmlns:r="http://schemas.openxmlformats.org/officeDocument/2006/relationships" id="256" r:id="R3df394d22ae4418c"/>
+    <p:sldId xmlns:r="http://schemas.openxmlformats.org/officeDocument/2006/relationships" id="257" r:id="R87fe651b08dd4a93"/>
+    <p:sldId xmlns:r="http://schemas.openxmlformats.org/officeDocument/2006/relationships" id="258" r:id="R6886a0a53b8b43ba"/>
+    <p:sldId xmlns:r="http://schemas.openxmlformats.org/officeDocument/2006/relationships" id="259" r:id="Rcdc9624cfe0c45ca"/>
+    <p:sldId xmlns:r="http://schemas.openxmlformats.org/officeDocument/2006/relationships" id="260" r:id="R056e53d794574769"/>
+    <p:sldId xmlns:r="http://schemas.openxmlformats.org/officeDocument/2006/relationships" id="261" r:id="R31346185b9f6450b"/>
+    <p:sldId xmlns:r="http://schemas.openxmlformats.org/officeDocument/2006/relationships" id="262" r:id="Re257a47a39be4131"/>
+    <p:sldId xmlns:r="http://schemas.openxmlformats.org/officeDocument/2006/relationships" id="263" r:id="R59f88f6630cf421b"/>
   </p:sldIdLst>
   <p:sldSz cx="12192000" cy="6858000"/>
   <p:notesSz cx="6858000" cy="9144000"/>
@@ -544,7 +544,7 @@
           <a:lstStyle xmlns:a="http://schemas.openxmlformats.org/drawingml/2006/main"/>
           <a:p xmlns:a="http://schemas.openxmlformats.org/drawingml/2006/main">
             <a:r>
-              <a:t>Keep MERLIN in control; let AI fail without stopping a truck. Our position is to add intelligence beside MERLIN, never inside it. An external asynchronous sidecar produces statistical forecasts and deterministic, bounded replenishment recommendations. MERLIN still generates every supplier order and remains the only system that sends EDI. If AI is absent, late, uncertain, invalid, or deliberately disabled, no current-run override appears and the incumbent min/max process continues. That is the removal test: take away the entire AI platform and trucks still receive orders. We are defending replay and shadow today. Production influence remains conditional on measured MERLIN, adapter, peak, cost, and operating evidence.</a:t>
+              <a:t>Keep MERLIN authoritative; let AI fail without stopping a truck. We add intelligence beside MERLIN, never inside it. The sidecar runs statistical forecasts and deterministic, bounded replenishment rules, but MERLIN still creates every supplier order and alone sends fixed-schema EDI. If AI is unavailable, late, incomplete, uncertain, invalid, or deliberately disabled, no override appears and MERLIN's incumbent min/max path continues. That is our removal test: take away the sidecar and stores still receive morning deliveries. Today we authorize discovery, replay, and shadow only. Production influence waits for measured MERLIN timing, certified adapters, peak tests, observed cost, and funded operations. That continuity is the architecture's primary acceptance test.</a:t>
             </a:r>
           </a:p>
         </p:txBody>
@@ -614,7 +614,7 @@
           <a:lstStyle xmlns:a="http://schemas.openxmlformats.org/drawingml/2006/main"/>
           <a:p xmlns:a="http://schemas.openxmlformats.org/drawingml/2006/main">
             <a:r>
-              <a:t>Change only the edges: three supported MERLIN extensions. We can add the external sidecar, narrow adapters, a control plane, monitoring, and immutable audit. We cannot modify MERLIN's replenishment engine or authority, touch POS, change supplier EDI, or move 04:00. Every MERLIN crossing maps to one declared extension: the nightly batch supplies a dated snapshot, the override table is read before generation, and the review queue operates after generation. The scheduler, undocumented tables, and manual rows are unsafe to touch. So is treating inventory as shelf truth: accuracy is 78 percent, which makes uncertainty a core design input rather than a data-cleaning footnote.</a:t>
+              <a:t>Change only the edges: nightly batch, override table, and review queue. We may build an external sidecar, monitoring, audit, and narrow certified adapters. We may not modify MERLIN's engine or authority, touch POS, alter supplier EDI, or move 04:00. The nightly extension supplies a dated read-only snapshot. The override table is read before order generation. The review queue operates after generation. Undocumented tables, scheduler hooks, manual rows, and direct supplier paths are unsafe. Inventory is only 78 percent accurate, so it is an uncertainty input with age, intervals, caps, and suppression, never real-time shelf truth. These are constraints, not preferences we plan to renegotiate.</a:t>
             </a:r>
           </a:p>
         </p:txBody>
@@ -684,7 +684,7 @@
           <a:lstStyle xmlns:a="http://schemas.openxmlformats.org/drawingml/2006/main"/>
           <a:p xmlns:a="http://schemas.openxmlformats.org/drawingml/2006/main">
             <a:r>
-              <a:t>The sidecar is advisory; every authoritative action stays inside MERLIN. The sidecar ingests approved immutable snapshots, validates schema, freshness, completeness, residency, and checksums, then builds features including inventory intervals. Statistical ML returns demand quantiles and confidence. A deterministic optimizer applies whole cases, shelf life, lead time, DC capacity, inventory feasibility, and category caps. The sidecar cannot contact suppliers. Only a certified adapter can write bounded current-run rows to the supported override table. MERLIN then runs its unmodified engine, creates the authoritative order, and owns native review and EDI. A current MERLIN quantity is not available before publication; it may return only after generation through a certified queue join. No certified join means no current-run comparison and no automated influence.</a:t>
+              <a:t>The sidecar is advisory; every authoritative action stays inside MERLIN. A dated snapshot enters validation for schema, freshness, completeness, checksum, and residency. Statistical ML produces demand quantiles and confidence. A deterministic optimizer applies whole cases, shelf life, inventory intervals, DC capacity, and category caps. Only the certified adapter can write bounded current-run rows to the supported override table. MERLIN reads them, runs its unmodified engine, and owns native review and EDI. The sidecar has no route to POS, suppliers, or the EDI connector. Current MERLIN quantity may return only after generation through certified queue correlation. Without that contract, comparison and automated influence remain disabled. The dashed return is evidence, not a control dependency.</a:t>
             </a:r>
           </a:p>
         </p:txBody>
@@ -754,7 +754,7 @@
           <a:lstStyle xmlns:a="http://schemas.openxmlformats.org/drawingml/2006/main"/>
           <a:p xmlns:a="http://schemas.openxmlformats.org/drawingml/2006/main">
             <a:r>
-              <a:t>AI closes at 02:00 to protect the immovable 04:00 cut-off. The sidecar gets a four-hour window. It validates the snapshot by 22:20, completes forecasting by 00:20, and deterministic optimization by 01:20. No new internal retry begins after 01:30. At 01:45, every required partition, model, ruleset, constraint, checksum, and audit record must form one complete signed manifest. Publication uses a short permit and a transaction-level epoch check, and every write closes at 02:00. MERLIN then owns two hours for generation, native review, and fixed-schema EDI. A missing partition, stale input, low confidence, bad checksum, expired permit, or failed transaction means publish nothing. If AI recovers at 03:30, it remains closed; MERLIN continues the current run.</a:t>
+              <a:t>AI closes at 02:00 so MERLIN owns the final two hours. Validation finishes by 22:20, forecasting by 00:20, and deterministic optimization by 01:20. No new retry starts after 01:30. At 01:45 every required partition, model, ruleset, constraint, checksum, and audit record must form one complete manifest. A short permit and same-transaction epoch check guard any certified write, and all AI writes close at 02:00. MERLIN then generates, reviews, and sends EDI before 04:00. Missing partitions, stale inputs, low confidence, expired permits, or failed commits become no override. Recovery at 03:30 stays closed. The 02:00 gate itself needs measured MERLIN P99 of at most 90 minutes or it moves earlier. Late output is retained only for diagnosis and later learning.</a:t>
             </a:r>
           </a:p>
         </p:txBody>
@@ -824,7 +824,7 @@
           <a:lstStyle xmlns:a="http://schemas.openxmlformats.org/drawingml/2006/main"/>
           <a:p xmlns:a="http://schemas.openxmlformats.org/drawingml/2006/main">
             <a:r>
-              <a:t>The design fits the envelope on paper - production waits for measured proof. We preserve both source populations: 27 million forecast outputs and 7.04 million stocked optimization candidates. Because the six-times denominator is ambiguous, the capacity test is intentionally conservative: 162 million forecast and 42.24 million optimization equivalents. At the target rates, the end-to-end sidecar path is 198.7 minutes inside 240, leaving 41.3 minutes. Annual operating cost targets 3.8 million dollars under the 4 million ceiling, or 0.0003856 dollars per nominal forecast when all AI costs are blended. These are targets, not benchmark results. Production requires three consecutive six-times runs, measured MERLIN P99 of at most 90 minutes for this close, a certified adapter, observed bills, and Finance approval.</a:t>
+              <a:t>Value and capacity fit on paper; production waits for measured proof. Success targets OOS from 7.2 to 3.0 percent, waste from 4.8 to 3.0 percent, WAPE from 41 to at most 25 percent, and lookup from about 50 to under 15 minutes per shift, while protecting 8,400 associates and a 2.4 percent margin. Capacity is 27 million forecasts and 7.04 million optimizations; the conservative six-times test is 162 million and 42.24 million at 30,000 and 15,000 per second. The 198.66-minute plan is reported as 198.7, leaving 41.3 minutes. Storage assumes 1.2 kilobytes per output: 32.4 gigabytes normal and 194.4 at six-times. Cost targets about 3.8 million dollars under 4 million. Production requires peak tests, measured storage and MERLIN timing, observed bills, and Finance approval.</a:t>
             </a:r>
           </a:p>
         </p:txBody>
@@ -894,7 +894,7 @@
           <a:lstStyle xmlns:a="http://schemas.openxmlformats.org/drawingml/2006/main"/>
           <a:p xmlns:a="http://schemas.openxmlformats.org/drawingml/2006/main">
             <a:r>
-              <a:t>Sidecar won because isolation matters more than convenience. Supported boundaries and replenishment continuity carry half the integration-pattern weight, so the external fail-open sidecar scores 4.80. Shadow scores 4.00, but shadow is a rollout state, not an architecture: it says nothing about deployment or interfaces. Event-driven integration would invent a legacy event contract; an API gateway would put availability on a synchronous path; an in-process plugin violates the unmodifiable, untested core. The ADR accepts real negatives: duplicated snapshots, possible divergence, certified adapter work, two-system traceability, and additional on-call cost. We accept those costs because they buy independent failure and rollback. The scores select direction; they do not waive release gates.</a:t>
+              <a:t>Sidecar wins on supported isolation, not convenience. With criteria totaling 100, the external sidecar scores 4.80 because it best protects legacy safety, fail-open continuity, supported interfaces, and rollback. Managed elastic batch scores 4.65 for deadline control and six-times scale. Hybrid hierarchical statistical ML scores 4.55 for quality, promotions, and uncertainty. We accept duplicated snapshots, reconciliation, SAP-certified adapter work, provider controls, and two-system operations. Sensitivity matters: shifting weight from WAPE to cost ties hybrid and global models at 4.45, so replay evidence decides the final statistical model. Scores select architecture direction; they never waive production gates. No LLM option enters numeric forecasting or replenishment optimization.</a:t>
             </a:r>
           </a:p>
         </p:txBody>
@@ -964,7 +964,7 @@
           <a:lstStyle xmlns:a="http://schemas.openxmlformats.org/drawingml/2006/main"/>
           <a:p xmlns:a="http://schemas.openxmlformats.org/drawingml/2006/main">
             <a:r>
-              <a:t>Every top risk has a threshold and a safe fallback. Deadline and inventory each score 20, peak and model behavior scores 16, and adapter integrity plus safety score 15. A deadline reserve below 30 minutes, a published row without a calibrated interval, peak throughput below its floor, a stale-epoch commit, a changed manual row, or any generated safety statement is a critical stop. The response is never to keep retrying toward 04:00. We bypass the AI run, suppress the row, disable the affected slice, activate the kill path, or refuse and escalate the safety question. MERLIN and POS remain independent. The remaining review minors concern score sensitivity and why omitted contenders ranked below the top five, not the operating controls.</a:t>
+              <a:t>Every top risk has a tripwire that leaves MERLIN running. Deadline and inventory each score 20, peak and model behavior scores 16, and legacy integrity plus safety score 15. Critical examples are any write at or after 02:00, inventory coverage below 85 percent, forecast throughput below 22,500 per second at peak, a stale-epoch commit or manual-row change, and any generated or unsupported safety display. The response is bypass, suppression, slice disablement, independent access revocation, or refusal and escalation; it is never a desperate retry toward 04:00. Residency, cost, review fatigue, and provider outage scored 10 or less and remain controlled NFRs. Omitted contenders are promoted if later evidence changes their scores.</a:t>
             </a:r>
           </a:p>
         </p:txBody>
@@ -1034,7 +1034,7 @@
           <a:lstStyle xmlns:a="http://schemas.openxmlformats.org/drawingml/2006/main"/>
           <a:p xmlns:a="http://schemas.openxmlformats.org/drawingml/2006/main">
             <a:r>
-              <a:t>Earn influence in stages; disable it in minutes. Discovery first certifies timing, queue fields, transaction behavior, locking, ownership, cleanup, and named operators. Historical replay proves forecast quality, inventory intervals, six-times throughput, cost, and failure behavior. Production shadow then runs for at least four weeks with zero MERLIN writes and representative promotions. Only after every gate passes do we consider a pilot: 20 stores, two low-risk non-fresh categories, no more than the measured transaction cap, and at most 100 review exceptions per night. A new disable epoch must be acknowledged within 30 seconds, reject new writes within 60, and reach verified safe within five minutes using independent SAP access revocation and exact-row cleanup. Our final defense is simple: remove the sidecar and MERLIN still orders.</a:t>
+              <a:t>Earn influence in stages; disable it in minutes. Discovery certifies timing, queue fields, transaction behavior, ownership, and cleanup. Replay tests quality, intervals, six-times load, cost, and failure behavior. Shadow runs for at least four representative weeks with zero MERLIN writes. Only after every gate passes may a pilot cover 20 stores, two low-risk non-fresh categories, no more than 5,000 rows within the measured adapter cap, and at most 100 reviews nightly. To disable, set a new epoch, stop permits, reject writes within 60 seconds, independently revoke SAP access if needed, clean exact AI-owned rows, and verify safe within five minutes. MERLIN continues throughout. Re-enable requires clean shadow evidence, cause closure, and renewed approval.</a:t>
             </a:r>
           </a:p>
         </p:txBody>
@@ -1102,7 +1102,7 @@
   </p:cSld>
   <p:clrMap bg1="lt1" tx1="dk1" bg2="lt2" tx2="dk2" accent1="accent1" accent2="accent2" accent3="accent3" accent4="accent4" accent5="accent5" accent6="accent6" hlink="hlink" folHlink="folHlink"/>
   <p:sldLayoutIdLst>
-    <p:sldLayoutId xmlns:r="http://schemas.openxmlformats.org/officeDocument/2006/relationships" id="2147483649" r:id="Re493875f1b664b15"/>
+    <p:sldLayoutId xmlns:r="http://schemas.openxmlformats.org/officeDocument/2006/relationships" id="2147483649" r:id="R2fd4a8c92b1d4702"/>
   </p:sldLayoutIdLst>
   <p:txStyles>
     <p:titleStyle>
@@ -1678,16 +1678,25 @@
           <a:lstStyle xmlns:a="http://schemas.openxmlformats.org/drawingml/2006/main"/>
           <a:p xmlns:a="http://schemas.openxmlformats.org/drawingml/2006/main">
             <a:pPr algn="l">
+              <a:buNone/>
               <a:defRPr sz="1800" b="1">
                 <a:solidFill>
                   <a:srgbClr val="3D8DFF"/>
                 </a:solidFill>
-                <a:latin typeface="Helvetica Neue"/>
-                <a:ea typeface="Helvetica Neue"/>
-                <a:cs typeface="Helvetica Neue"/>
-              </a:defRPr>
-            </a:pPr>
-            <a:r>
+                <a:latin typeface="Arial"/>
+                <a:ea typeface="Arial"/>
+                <a:cs typeface="Arial"/>
+              </a:defRPr>
+            </a:pPr>
+            <a:r>
+              <a:rPr sz="1800" b="1">
+                <a:solidFill>
+                  <a:srgbClr val="3D8DFF"/>
+                </a:solidFill>
+                <a:latin typeface="Arial"/>
+                <a:ea typeface="Arial"/>
+                <a:cs typeface="Arial"/>
+              </a:rPr>
               <a:t>GROUP 4  •  VARIANT B — AI RETROFIT</a:t>
             </a:r>
           </a:p>
@@ -1723,16 +1732,25 @@
           <a:lstStyle xmlns:a="http://schemas.openxmlformats.org/drawingml/2006/main"/>
           <a:p xmlns:a="http://schemas.openxmlformats.org/drawingml/2006/main">
             <a:pPr algn="l">
+              <a:buNone/>
               <a:defRPr sz="5400" b="1">
                 <a:solidFill>
                   <a:srgbClr val="000000"/>
                 </a:solidFill>
-                <a:latin typeface="Helvetica Neue"/>
-                <a:ea typeface="Helvetica Neue"/>
-                <a:cs typeface="Helvetica Neue"/>
-              </a:defRPr>
-            </a:pPr>
-            <a:r>
+                <a:latin typeface="Arial"/>
+                <a:ea typeface="Arial"/>
+                <a:cs typeface="Arial"/>
+              </a:defRPr>
+            </a:pPr>
+            <a:r>
+              <a:rPr sz="5400" b="1">
+                <a:solidFill>
+                  <a:srgbClr val="000000"/>
+                </a:solidFill>
+                <a:latin typeface="Arial"/>
+                <a:ea typeface="Arial"/>
+                <a:cs typeface="Arial"/>
+              </a:rPr>
               <a:t>Keep MERLIN in control;
 let AI fail without stopping a truck</a:t>
             </a:r>
@@ -1872,16 +1890,25 @@
           <a:lstStyle xmlns:a="http://schemas.openxmlformats.org/drawingml/2006/main"/>
           <a:p xmlns:a="http://schemas.openxmlformats.org/drawingml/2006/main">
             <a:pPr algn="l">
+              <a:buNone/>
               <a:defRPr sz="1800">
                 <a:solidFill>
                   <a:srgbClr val="000000"/>
                 </a:solidFill>
-                <a:latin typeface="Helvetica Neue"/>
-                <a:ea typeface="Helvetica Neue"/>
-                <a:cs typeface="Helvetica Neue"/>
-              </a:defRPr>
-            </a:pPr>
-            <a:r>
+                <a:latin typeface="Arial"/>
+                <a:ea typeface="Arial"/>
+                <a:cs typeface="Arial"/>
+              </a:defRPr>
+            </a:pPr>
+            <a:r>
+              <a:rPr sz="1800">
+                <a:solidFill>
+                  <a:srgbClr val="000000"/>
+                </a:solidFill>
+                <a:latin typeface="Arial"/>
+                <a:ea typeface="Arial"/>
+                <a:cs typeface="Arial"/>
+              </a:rPr>
               <a:t>• External, asynchronous, fail-open AI sidecar
 • Statistical forecast ML + deterministic replenishment rules
 • MERLIN generates every order and alone sends supplier EDI
@@ -1921,16 +1948,25 @@
           <a:lstStyle xmlns:a="http://schemas.openxmlformats.org/drawingml/2006/main"/>
           <a:p xmlns:a="http://schemas.openxmlformats.org/drawingml/2006/main">
             <a:pPr algn="l">
+              <a:buNone/>
               <a:defRPr sz="1200">
                 <a:solidFill>
                   <a:srgbClr val="586174"/>
                 </a:solidFill>
-                <a:latin typeface="Helvetica Neue"/>
-                <a:ea typeface="Helvetica Neue"/>
-                <a:cs typeface="Helvetica Neue"/>
-              </a:defRPr>
-            </a:pPr>
-            <a:r>
+                <a:latin typeface="Arial"/>
+                <a:ea typeface="Arial"/>
+                <a:cs typeface="Arial"/>
+              </a:defRPr>
+            </a:pPr>
+            <a:r>
+              <a:rPr sz="1200">
+                <a:solidFill>
+                  <a:srgbClr val="586174"/>
+                </a:solidFill>
+                <a:latin typeface="Arial"/>
+                <a:ea typeface="Arial"/>
+                <a:cs typeface="Arial"/>
+              </a:rPr>
               <a:t>Owner: ĐINH XUÂN DŨNG (123015)</a:t>
             </a:r>
           </a:p>
@@ -1966,16 +2002,25 @@
           <a:lstStyle xmlns:a="http://schemas.openxmlformats.org/drawingml/2006/main"/>
           <a:p xmlns:a="http://schemas.openxmlformats.org/drawingml/2006/main">
             <a:pPr algn="l">
+              <a:buNone/>
               <a:defRPr sz="1350">
                 <a:solidFill>
                   <a:srgbClr val="586174"/>
                 </a:solidFill>
-                <a:latin typeface="Helvetica Neue"/>
-                <a:ea typeface="Helvetica Neue"/>
-                <a:cs typeface="Helvetica Neue"/>
-              </a:defRPr>
-            </a:pPr>
-            <a:r>
+                <a:latin typeface="Arial"/>
+                <a:ea typeface="Arial"/>
+                <a:cs typeface="Arial"/>
+              </a:defRPr>
+            </a:pPr>
+            <a:r>
+              <a:rPr sz="1350">
+                <a:solidFill>
+                  <a:srgbClr val="586174"/>
+                </a:solidFill>
+                <a:latin typeface="Arial"/>
+                <a:ea typeface="Arial"/>
+                <a:cs typeface="Arial"/>
+              </a:rPr>
               <a:t>Workshop 1 — End-to-End AI System Design Lab</a:t>
             </a:r>
           </a:p>
@@ -2011,16 +2056,25 @@
           <a:lstStyle xmlns:a="http://schemas.openxmlformats.org/drawingml/2006/main"/>
           <a:p xmlns:a="http://schemas.openxmlformats.org/drawingml/2006/main">
             <a:pPr algn="r">
+              <a:buNone/>
               <a:defRPr sz="1350">
                 <a:solidFill>
                   <a:srgbClr val="000000"/>
                 </a:solidFill>
-                <a:latin typeface="Helvetica Neue"/>
-                <a:ea typeface="Helvetica Neue"/>
-                <a:cs typeface="Helvetica Neue"/>
-              </a:defRPr>
-            </a:pPr>
-            <a:r>
+                <a:latin typeface="Arial"/>
+                <a:ea typeface="Arial"/>
+                <a:cs typeface="Arial"/>
+              </a:defRPr>
+            </a:pPr>
+            <a:r>
+              <a:rPr sz="1350">
+                <a:solidFill>
+                  <a:srgbClr val="000000"/>
+                </a:solidFill>
+                <a:latin typeface="Arial"/>
+                <a:ea typeface="Arial"/>
+                <a:cs typeface="Arial"/>
+              </a:rPr>
               <a:t>1</a:t>
             </a:r>
           </a:p>
@@ -2085,16 +2139,25 @@
           <a:lstStyle xmlns:a="http://schemas.openxmlformats.org/drawingml/2006/main"/>
           <a:p xmlns:a="http://schemas.openxmlformats.org/drawingml/2006/main">
             <a:pPr algn="l">
+              <a:buNone/>
               <a:defRPr sz="3600" b="1">
                 <a:solidFill>
                   <a:srgbClr val="000000"/>
                 </a:solidFill>
-                <a:latin typeface="Helvetica Neue"/>
-                <a:ea typeface="Helvetica Neue"/>
-                <a:cs typeface="Helvetica Neue"/>
-              </a:defRPr>
-            </a:pPr>
-            <a:r>
+                <a:latin typeface="Arial"/>
+                <a:ea typeface="Arial"/>
+                <a:cs typeface="Arial"/>
+              </a:defRPr>
+            </a:pPr>
+            <a:r>
+              <a:rPr sz="3600" b="1">
+                <a:solidFill>
+                  <a:srgbClr val="000000"/>
+                </a:solidFill>
+                <a:latin typeface="Arial"/>
+                <a:ea typeface="Arial"/>
+                <a:cs typeface="Arial"/>
+              </a:rPr>
               <a:t>Change only the edges: three supported MERLIN extensions</a:t>
             </a:r>
           </a:p>
@@ -2163,16 +2226,25 @@
           <a:lstStyle xmlns:a="http://schemas.openxmlformats.org/drawingml/2006/main"/>
           <a:p xmlns:a="http://schemas.openxmlformats.org/drawingml/2006/main">
             <a:pPr algn="l">
+              <a:buNone/>
               <a:defRPr sz="2400" b="1">
                 <a:solidFill>
                   <a:srgbClr val="000000"/>
                 </a:solidFill>
-                <a:latin typeface="Helvetica Neue"/>
-                <a:ea typeface="Helvetica Neue"/>
-                <a:cs typeface="Helvetica Neue"/>
-              </a:defRPr>
-            </a:pPr>
-            <a:r>
+                <a:latin typeface="Arial"/>
+                <a:ea typeface="Arial"/>
+                <a:cs typeface="Arial"/>
+              </a:defRPr>
+            </a:pPr>
+            <a:r>
+              <a:rPr sz="2400" b="1">
+                <a:solidFill>
+                  <a:srgbClr val="000000"/>
+                </a:solidFill>
+                <a:latin typeface="Arial"/>
+                <a:ea typeface="Arial"/>
+                <a:cs typeface="Arial"/>
+              </a:rPr>
               <a:t>Can change</a:t>
             </a:r>
           </a:p>
@@ -2208,16 +2280,25 @@
           <a:lstStyle xmlns:a="http://schemas.openxmlformats.org/drawingml/2006/main"/>
           <a:p xmlns:a="http://schemas.openxmlformats.org/drawingml/2006/main">
             <a:pPr algn="l">
+              <a:buNone/>
               <a:defRPr sz="1800">
                 <a:solidFill>
                   <a:srgbClr val="000000"/>
                 </a:solidFill>
-                <a:latin typeface="Helvetica Neue"/>
-                <a:ea typeface="Helvetica Neue"/>
-                <a:cs typeface="Helvetica Neue"/>
-              </a:defRPr>
-            </a:pPr>
-            <a:r>
+                <a:latin typeface="Arial"/>
+                <a:ea typeface="Arial"/>
+                <a:cs typeface="Arial"/>
+              </a:defRPr>
+            </a:pPr>
+            <a:r>
+              <a:rPr sz="1800">
+                <a:solidFill>
+                  <a:srgbClr val="000000"/>
+                </a:solidFill>
+                <a:latin typeface="Arial"/>
+                <a:ea typeface="Arial"/>
+                <a:cs typeface="Arial"/>
+              </a:rPr>
               <a:t>External sidecar
 Narrow adapters
 Control + immutable audit</a:t>
@@ -2288,16 +2369,25 @@
           <a:lstStyle xmlns:a="http://schemas.openxmlformats.org/drawingml/2006/main"/>
           <a:p xmlns:a="http://schemas.openxmlformats.org/drawingml/2006/main">
             <a:pPr algn="l">
+              <a:buNone/>
               <a:defRPr sz="2400" b="1">
                 <a:solidFill>
                   <a:srgbClr val="000000"/>
                 </a:solidFill>
-                <a:latin typeface="Helvetica Neue"/>
-                <a:ea typeface="Helvetica Neue"/>
-                <a:cs typeface="Helvetica Neue"/>
-              </a:defRPr>
-            </a:pPr>
-            <a:r>
+                <a:latin typeface="Arial"/>
+                <a:ea typeface="Arial"/>
+                <a:cs typeface="Arial"/>
+              </a:defRPr>
+            </a:pPr>
+            <a:r>
+              <a:rPr sz="2400" b="1">
+                <a:solidFill>
+                  <a:srgbClr val="000000"/>
+                </a:solidFill>
+                <a:latin typeface="Arial"/>
+                <a:ea typeface="Arial"/>
+                <a:cs typeface="Arial"/>
+              </a:rPr>
               <a:t>Cannot change</a:t>
             </a:r>
           </a:p>
@@ -2333,16 +2423,25 @@
           <a:lstStyle xmlns:a="http://schemas.openxmlformats.org/drawingml/2006/main"/>
           <a:p xmlns:a="http://schemas.openxmlformats.org/drawingml/2006/main">
             <a:pPr algn="l">
+              <a:buNone/>
               <a:defRPr sz="1800">
                 <a:solidFill>
                   <a:srgbClr val="000000"/>
                 </a:solidFill>
-                <a:latin typeface="Helvetica Neue"/>
-                <a:ea typeface="Helvetica Neue"/>
-                <a:cs typeface="Helvetica Neue"/>
-              </a:defRPr>
-            </a:pPr>
-            <a:r>
+                <a:latin typeface="Arial"/>
+                <a:ea typeface="Arial"/>
+                <a:cs typeface="Arial"/>
+              </a:defRPr>
+            </a:pPr>
+            <a:r>
+              <a:rPr sz="1800">
+                <a:solidFill>
+                  <a:srgbClr val="000000"/>
+                </a:solidFill>
+                <a:latin typeface="Arial"/>
+                <a:ea typeface="Arial"/>
+                <a:cs typeface="Arial"/>
+              </a:rPr>
               <a:t>MERLIN engine + authority
 POS and fixed EDI schema
 04:00 supplier cut-off</a:t>
@@ -2413,16 +2512,25 @@
           <a:lstStyle xmlns:a="http://schemas.openxmlformats.org/drawingml/2006/main"/>
           <a:p xmlns:a="http://schemas.openxmlformats.org/drawingml/2006/main">
             <a:pPr algn="l">
+              <a:buNone/>
               <a:defRPr sz="2400" b="1">
                 <a:solidFill>
                   <a:srgbClr val="000000"/>
                 </a:solidFill>
-                <a:latin typeface="Helvetica Neue"/>
-                <a:ea typeface="Helvetica Neue"/>
-                <a:cs typeface="Helvetica Neue"/>
-              </a:defRPr>
-            </a:pPr>
-            <a:r>
+                <a:latin typeface="Arial"/>
+                <a:ea typeface="Arial"/>
+                <a:cs typeface="Arial"/>
+              </a:defRPr>
+            </a:pPr>
+            <a:r>
+              <a:rPr sz="2400" b="1">
+                <a:solidFill>
+                  <a:srgbClr val="000000"/>
+                </a:solidFill>
+                <a:latin typeface="Arial"/>
+                <a:ea typeface="Arial"/>
+                <a:cs typeface="Arial"/>
+              </a:rPr>
               <a:t>Unsafe to touch</a:t>
             </a:r>
           </a:p>
@@ -2458,16 +2566,25 @@
           <a:lstStyle xmlns:a="http://schemas.openxmlformats.org/drawingml/2006/main"/>
           <a:p xmlns:a="http://schemas.openxmlformats.org/drawingml/2006/main">
             <a:pPr algn="l">
+              <a:buNone/>
               <a:defRPr sz="1800">
                 <a:solidFill>
                   <a:srgbClr val="000000"/>
                 </a:solidFill>
-                <a:latin typeface="Helvetica Neue"/>
-                <a:ea typeface="Helvetica Neue"/>
-                <a:cs typeface="Helvetica Neue"/>
-              </a:defRPr>
-            </a:pPr>
-            <a:r>
+                <a:latin typeface="Arial"/>
+                <a:ea typeface="Arial"/>
+                <a:cs typeface="Arial"/>
+              </a:defRPr>
+            </a:pPr>
+            <a:r>
+              <a:rPr sz="1800">
+                <a:solidFill>
+                  <a:srgbClr val="000000"/>
+                </a:solidFill>
+                <a:latin typeface="Arial"/>
+                <a:ea typeface="Arial"/>
+                <a:cs typeface="Arial"/>
+              </a:rPr>
               <a:t>Scheduler + undocumented tables
 Manual rows
 Point inventory as truth</a:t>
@@ -2538,16 +2655,25 @@
           <a:lstStyle xmlns:a="http://schemas.openxmlformats.org/drawingml/2006/main"/>
           <a:p xmlns:a="http://schemas.openxmlformats.org/drawingml/2006/main">
             <a:pPr algn="l">
+              <a:buNone/>
               <a:defRPr sz="1800" b="1">
                 <a:solidFill>
                   <a:srgbClr val="3D8DFF"/>
                 </a:solidFill>
-                <a:latin typeface="Helvetica Neue"/>
-                <a:ea typeface="Helvetica Neue"/>
-                <a:cs typeface="Helvetica Neue"/>
-              </a:defRPr>
-            </a:pPr>
-            <a:r>
+                <a:latin typeface="Arial"/>
+                <a:ea typeface="Arial"/>
+                <a:cs typeface="Arial"/>
+              </a:defRPr>
+            </a:pPr>
+            <a:r>
+              <a:rPr sz="1800" b="1">
+                <a:solidFill>
+                  <a:srgbClr val="3D8DFF"/>
+                </a:solidFill>
+                <a:latin typeface="Arial"/>
+                <a:ea typeface="Arial"/>
+                <a:cs typeface="Arial"/>
+              </a:rPr>
               <a:t>Only supported crossings  →  nightly batch  •  pre-generation override table  •  post-generation review queue</a:t>
             </a:r>
           </a:p>
@@ -2583,16 +2709,25 @@
           <a:lstStyle xmlns:a="http://schemas.openxmlformats.org/drawingml/2006/main"/>
           <a:p xmlns:a="http://schemas.openxmlformats.org/drawingml/2006/main">
             <a:pPr algn="l">
+              <a:buNone/>
               <a:defRPr sz="1200">
                 <a:solidFill>
                   <a:srgbClr val="586174"/>
                 </a:solidFill>
-                <a:latin typeface="Helvetica Neue"/>
-                <a:ea typeface="Helvetica Neue"/>
-                <a:cs typeface="Helvetica Neue"/>
-              </a:defRPr>
-            </a:pPr>
-            <a:r>
+                <a:latin typeface="Arial"/>
+                <a:ea typeface="Arial"/>
+                <a:cs typeface="Arial"/>
+              </a:defRPr>
+            </a:pPr>
+            <a:r>
+              <a:rPr sz="1200">
+                <a:solidFill>
+                  <a:srgbClr val="586174"/>
+                </a:solidFill>
+                <a:latin typeface="Arial"/>
+                <a:ea typeface="Arial"/>
+                <a:cs typeface="Arial"/>
+              </a:rPr>
               <a:t>Owner: TRẦN TRỌNG PHÚ (197320)</a:t>
             </a:r>
           </a:p>
@@ -2628,16 +2763,25 @@
           <a:lstStyle xmlns:a="http://schemas.openxmlformats.org/drawingml/2006/main"/>
           <a:p xmlns:a="http://schemas.openxmlformats.org/drawingml/2006/main">
             <a:pPr algn="l">
+              <a:buNone/>
               <a:defRPr sz="1350">
                 <a:solidFill>
                   <a:srgbClr val="586174"/>
                 </a:solidFill>
-                <a:latin typeface="Helvetica Neue"/>
-                <a:ea typeface="Helvetica Neue"/>
-                <a:cs typeface="Helvetica Neue"/>
-              </a:defRPr>
-            </a:pPr>
-            <a:r>
+                <a:latin typeface="Arial"/>
+                <a:ea typeface="Arial"/>
+                <a:cs typeface="Arial"/>
+              </a:defRPr>
+            </a:pPr>
+            <a:r>
+              <a:rPr sz="1350">
+                <a:solidFill>
+                  <a:srgbClr val="586174"/>
+                </a:solidFill>
+                <a:latin typeface="Arial"/>
+                <a:ea typeface="Arial"/>
+                <a:cs typeface="Arial"/>
+              </a:rPr>
               <a:t>Legacy assessment</a:t>
             </a:r>
           </a:p>
@@ -2673,16 +2817,25 @@
           <a:lstStyle xmlns:a="http://schemas.openxmlformats.org/drawingml/2006/main"/>
           <a:p xmlns:a="http://schemas.openxmlformats.org/drawingml/2006/main">
             <a:pPr algn="r">
+              <a:buNone/>
               <a:defRPr sz="1350">
                 <a:solidFill>
                   <a:srgbClr val="000000"/>
                 </a:solidFill>
-                <a:latin typeface="Helvetica Neue"/>
-                <a:ea typeface="Helvetica Neue"/>
-                <a:cs typeface="Helvetica Neue"/>
-              </a:defRPr>
-            </a:pPr>
-            <a:r>
+                <a:latin typeface="Arial"/>
+                <a:ea typeface="Arial"/>
+                <a:cs typeface="Arial"/>
+              </a:defRPr>
+            </a:pPr>
+            <a:r>
+              <a:rPr sz="1350">
+                <a:solidFill>
+                  <a:srgbClr val="000000"/>
+                </a:solidFill>
+                <a:latin typeface="Arial"/>
+                <a:ea typeface="Arial"/>
+                <a:cs typeface="Arial"/>
+              </a:rPr>
               <a:t>2</a:t>
             </a:r>
           </a:p>
@@ -2747,16 +2900,25 @@
           <a:lstStyle xmlns:a="http://schemas.openxmlformats.org/drawingml/2006/main"/>
           <a:p xmlns:a="http://schemas.openxmlformats.org/drawingml/2006/main">
             <a:pPr algn="l">
+              <a:buNone/>
               <a:defRPr sz="3600" b="1">
                 <a:solidFill>
                   <a:srgbClr val="000000"/>
                 </a:solidFill>
-                <a:latin typeface="Helvetica Neue"/>
-                <a:ea typeface="Helvetica Neue"/>
-                <a:cs typeface="Helvetica Neue"/>
-              </a:defRPr>
-            </a:pPr>
-            <a:r>
+                <a:latin typeface="Arial"/>
+                <a:ea typeface="Arial"/>
+                <a:cs typeface="Arial"/>
+              </a:defRPr>
+            </a:pPr>
+            <a:r>
+              <a:rPr sz="3600" b="1">
+                <a:solidFill>
+                  <a:srgbClr val="000000"/>
+                </a:solidFill>
+                <a:latin typeface="Arial"/>
+                <a:ea typeface="Arial"/>
+                <a:cs typeface="Arial"/>
+              </a:rPr>
               <a:t>The sidecar is advisory; authority stays inside MERLIN</a:t>
             </a:r>
           </a:p>
@@ -2792,16 +2954,25 @@
           <a:lstStyle xmlns:a="http://schemas.openxmlformats.org/drawingml/2006/main"/>
           <a:p xmlns:a="http://schemas.openxmlformats.org/drawingml/2006/main">
             <a:pPr algn="l">
+              <a:buNone/>
               <a:defRPr sz="1725">
                 <a:solidFill>
                   <a:srgbClr val="000000"/>
                 </a:solidFill>
-                <a:latin typeface="Helvetica Neue"/>
-                <a:ea typeface="Helvetica Neue"/>
-                <a:cs typeface="Helvetica Neue"/>
-              </a:defRPr>
-            </a:pPr>
-            <a:r>
+                <a:latin typeface="Arial"/>
+                <a:ea typeface="Arial"/>
+                <a:cs typeface="Arial"/>
+              </a:defRPr>
+            </a:pPr>
+            <a:r>
+              <a:rPr sz="1725">
+                <a:solidFill>
+                  <a:srgbClr val="000000"/>
+                </a:solidFill>
+                <a:latin typeface="Arial"/>
+                <a:ea typeface="Arial"/>
+                <a:cs typeface="Arial"/>
+              </a:rPr>
               <a:t>• Nightly snapshot → validation → features → statistical forecast ML → deterministic optimizer
 • Only certified adapters can write bounded current-run rows
 • MERLIN generates orders; current quantity returns only after a certified post-generation join
@@ -2896,8 +3067,8 @@
         </p:nvSpPr>
         <p:spPr>
           <a:xfrm xmlns:a="http://schemas.openxmlformats.org/drawingml/2006/main">
-            <a:off x="6553200" y="1752600"/>
-            <a:ext cx="2190750" cy="285750"/>
+            <a:off x="6315075" y="1752600"/>
+            <a:ext cx="2667000" cy="285750"/>
           </a:xfrm>
           <a:prstGeom xmlns:a="http://schemas.openxmlformats.org/drawingml/2006/main" prst="rect">
             <a:avLst/>
@@ -2910,16 +3081,25 @@
           <a:lstStyle xmlns:a="http://schemas.openxmlformats.org/drawingml/2006/main"/>
           <a:p xmlns:a="http://schemas.openxmlformats.org/drawingml/2006/main">
             <a:pPr algn="ctr">
+              <a:buNone/>
               <a:defRPr sz="1650" b="1">
                 <a:solidFill>
                   <a:srgbClr val="3D8DFF"/>
                 </a:solidFill>
-                <a:latin typeface="Helvetica Neue"/>
-                <a:ea typeface="Helvetica Neue"/>
-                <a:cs typeface="Helvetica Neue"/>
-              </a:defRPr>
-            </a:pPr>
-            <a:r>
+                <a:latin typeface="Arial"/>
+                <a:ea typeface="Arial"/>
+                <a:cs typeface="Arial"/>
+              </a:defRPr>
+            </a:pPr>
+            <a:r>
+              <a:rPr sz="1650" b="1">
+                <a:solidFill>
+                  <a:srgbClr val="3D8DFF"/>
+                </a:solidFill>
+                <a:latin typeface="Arial"/>
+                <a:ea typeface="Arial"/>
+                <a:cs typeface="Arial"/>
+              </a:rPr>
               <a:t>AI SIDECAR — ADVISORY</a:t>
             </a:r>
           </a:p>
@@ -2941,8 +3121,8 @@
         </p:nvSpPr>
         <p:spPr>
           <a:xfrm xmlns:a="http://schemas.openxmlformats.org/drawingml/2006/main">
-            <a:off x="9239250" y="1752600"/>
-            <a:ext cx="2190750" cy="285750"/>
+            <a:off x="9144000" y="1752600"/>
+            <a:ext cx="2381250" cy="285750"/>
           </a:xfrm>
           <a:prstGeom xmlns:a="http://schemas.openxmlformats.org/drawingml/2006/main" prst="rect">
             <a:avLst/>
@@ -2955,16 +3135,25 @@
           <a:lstStyle xmlns:a="http://schemas.openxmlformats.org/drawingml/2006/main"/>
           <a:p xmlns:a="http://schemas.openxmlformats.org/drawingml/2006/main">
             <a:pPr algn="ctr">
+              <a:buNone/>
               <a:defRPr sz="1650" b="1">
                 <a:solidFill>
                   <a:srgbClr val="000000"/>
                 </a:solidFill>
-                <a:latin typeface="Helvetica Neue"/>
-                <a:ea typeface="Helvetica Neue"/>
-                <a:cs typeface="Helvetica Neue"/>
-              </a:defRPr>
-            </a:pPr>
-            <a:r>
+                <a:latin typeface="Arial"/>
+                <a:ea typeface="Arial"/>
+                <a:cs typeface="Arial"/>
+              </a:defRPr>
+            </a:pPr>
+            <a:r>
+              <a:rPr sz="1650" b="1">
+                <a:solidFill>
+                  <a:srgbClr val="000000"/>
+                </a:solidFill>
+                <a:latin typeface="Arial"/>
+                <a:ea typeface="Arial"/>
+                <a:cs typeface="Arial"/>
+              </a:rPr>
               <a:t>MERLIN — AUTHORITY</a:t>
             </a:r>
           </a:p>
@@ -3000,16 +3189,25 @@
           <a:lstStyle xmlns:a="http://schemas.openxmlformats.org/drawingml/2006/main"/>
           <a:p xmlns:a="http://schemas.openxmlformats.org/drawingml/2006/main">
             <a:pPr algn="l">
+              <a:buNone/>
               <a:defRPr sz="1200">
                 <a:solidFill>
                   <a:srgbClr val="586174"/>
                 </a:solidFill>
-                <a:latin typeface="Helvetica Neue"/>
-                <a:ea typeface="Helvetica Neue"/>
-                <a:cs typeface="Helvetica Neue"/>
-              </a:defRPr>
-            </a:pPr>
-            <a:r>
+                <a:latin typeface="Arial"/>
+                <a:ea typeface="Arial"/>
+                <a:cs typeface="Arial"/>
+              </a:defRPr>
+            </a:pPr>
+            <a:r>
+              <a:rPr sz="1200">
+                <a:solidFill>
+                  <a:srgbClr val="586174"/>
+                </a:solidFill>
+                <a:latin typeface="Arial"/>
+                <a:ea typeface="Arial"/>
+                <a:cs typeface="Arial"/>
+              </a:rPr>
               <a:t>Owner: LÊ NGUYỄN SỸ BÌNH (122980)</a:t>
             </a:r>
           </a:p>
@@ -3045,16 +3243,25 @@
           <a:lstStyle xmlns:a="http://schemas.openxmlformats.org/drawingml/2006/main"/>
           <a:p xmlns:a="http://schemas.openxmlformats.org/drawingml/2006/main">
             <a:pPr algn="l">
+              <a:buNone/>
               <a:defRPr sz="1350">
                 <a:solidFill>
                   <a:srgbClr val="586174"/>
                 </a:solidFill>
-                <a:latin typeface="Helvetica Neue"/>
-                <a:ea typeface="Helvetica Neue"/>
-                <a:cs typeface="Helvetica Neue"/>
-              </a:defRPr>
-            </a:pPr>
-            <a:r>
+                <a:latin typeface="Arial"/>
+                <a:ea typeface="Arial"/>
+                <a:cs typeface="Arial"/>
+              </a:defRPr>
+            </a:pPr>
+            <a:r>
+              <a:rPr sz="1350">
+                <a:solidFill>
+                  <a:srgbClr val="586174"/>
+                </a:solidFill>
+                <a:latin typeface="Arial"/>
+                <a:ea typeface="Arial"/>
+                <a:cs typeface="Arial"/>
+              </a:rPr>
               <a:t>C4 context + container</a:t>
             </a:r>
           </a:p>
@@ -3090,16 +3297,25 @@
           <a:lstStyle xmlns:a="http://schemas.openxmlformats.org/drawingml/2006/main"/>
           <a:p xmlns:a="http://schemas.openxmlformats.org/drawingml/2006/main">
             <a:pPr algn="r">
+              <a:buNone/>
               <a:defRPr sz="1350">
                 <a:solidFill>
                   <a:srgbClr val="000000"/>
                 </a:solidFill>
-                <a:latin typeface="Helvetica Neue"/>
-                <a:ea typeface="Helvetica Neue"/>
-                <a:cs typeface="Helvetica Neue"/>
-              </a:defRPr>
-            </a:pPr>
-            <a:r>
+                <a:latin typeface="Arial"/>
+                <a:ea typeface="Arial"/>
+                <a:cs typeface="Arial"/>
+              </a:defRPr>
+            </a:pPr>
+            <a:r>
+              <a:rPr sz="1350">
+                <a:solidFill>
+                  <a:srgbClr val="000000"/>
+                </a:solidFill>
+                <a:latin typeface="Arial"/>
+                <a:ea typeface="Arial"/>
+                <a:cs typeface="Arial"/>
+              </a:rPr>
               <a:t>3</a:t>
             </a:r>
           </a:p>
@@ -3269,8 +3485,8 @@
         </p:nvSpPr>
         <p:spPr>
           <a:xfrm xmlns:a="http://schemas.openxmlformats.org/drawingml/2006/main">
-            <a:off x="6629400" y="4857750"/>
-            <a:ext cx="2038350" cy="552450"/>
+            <a:off x="6457950" y="4857750"/>
+            <a:ext cx="2381250" cy="552450"/>
           </a:xfrm>
           <a:prstGeom xmlns:a="http://schemas.openxmlformats.org/drawingml/2006/main" prst="rect">
             <a:avLst/>
@@ -3477,7 +3693,7 @@
       </p:sp>
       <p:cxnSp>
         <p:nvCxnSpPr>
-          <p:cNvPr id="58" name=""/>
+          <p:cNvPr id="254" name=""/>
           <p:cNvCxnSpPr>
             <a:stCxn xmlns:a="http://schemas.openxmlformats.org/drawingml/2006/main" id="10" idx="2"/>
             <a:endCxn xmlns:a="http://schemas.openxmlformats.org/drawingml/2006/main" id="11" idx="0"/>
@@ -3503,7 +3719,7 @@
       </p:cxnSp>
       <p:cxnSp>
         <p:nvCxnSpPr>
-          <p:cNvPr id="59" name=""/>
+          <p:cNvPr id="255" name=""/>
           <p:cNvCxnSpPr>
             <a:stCxn xmlns:a="http://schemas.openxmlformats.org/drawingml/2006/main" id="11" idx="2"/>
             <a:endCxn xmlns:a="http://schemas.openxmlformats.org/drawingml/2006/main" id="12" idx="0"/>
@@ -3529,7 +3745,7 @@
       </p:cxnSp>
       <p:cxnSp>
         <p:nvCxnSpPr>
-          <p:cNvPr id="60" name=""/>
+          <p:cNvPr id="256" name=""/>
           <p:cNvCxnSpPr>
             <a:stCxn xmlns:a="http://schemas.openxmlformats.org/drawingml/2006/main" id="12" idx="2"/>
             <a:endCxn xmlns:a="http://schemas.openxmlformats.org/drawingml/2006/main" id="13" idx="0"/>
@@ -3555,7 +3771,7 @@
       </p:cxnSp>
       <p:cxnSp>
         <p:nvCxnSpPr>
-          <p:cNvPr id="61" name=""/>
+          <p:cNvPr id="257" name=""/>
           <p:cNvCxnSpPr>
             <a:stCxn xmlns:a="http://schemas.openxmlformats.org/drawingml/2006/main" id="13" idx="2"/>
             <a:endCxn xmlns:a="http://schemas.openxmlformats.org/drawingml/2006/main" id="14" idx="0"/>
@@ -3581,7 +3797,7 @@
       </p:cxnSp>
       <p:cxnSp>
         <p:nvCxnSpPr>
-          <p:cNvPr id="62" name=""/>
+          <p:cNvPr id="258" name=""/>
           <p:cNvCxnSpPr>
             <a:stCxn xmlns:a="http://schemas.openxmlformats.org/drawingml/2006/main" id="14" idx="3"/>
             <a:endCxn xmlns:a="http://schemas.openxmlformats.org/drawingml/2006/main" id="16" idx="1"/>
@@ -3590,8 +3806,8 @@
         </p:nvCxnSpPr>
         <p:spPr>
           <a:xfrm xmlns:a="http://schemas.openxmlformats.org/drawingml/2006/main" flipV="1">
-            <a:off x="8667750" y="3028950"/>
-            <a:ext cx="647700" cy="2105025"/>
+            <a:off x="8839200" y="3028950"/>
+            <a:ext cx="476250" cy="2105025"/>
           </a:xfrm>
           <a:prstGeom xmlns:a="http://schemas.openxmlformats.org/drawingml/2006/main" prst="bentConnector3">
             <a:avLst>
@@ -3609,7 +3825,7 @@
       </p:cxnSp>
       <p:cxnSp>
         <p:nvCxnSpPr>
-          <p:cNvPr id="63" name=""/>
+          <p:cNvPr id="259" name=""/>
           <p:cNvCxnSpPr>
             <a:stCxn xmlns:a="http://schemas.openxmlformats.org/drawingml/2006/main" id="16" idx="2"/>
             <a:endCxn xmlns:a="http://schemas.openxmlformats.org/drawingml/2006/main" id="17" idx="0"/>
@@ -3635,7 +3851,7 @@
       </p:cxnSp>
       <p:cxnSp>
         <p:nvCxnSpPr>
-          <p:cNvPr id="64" name=""/>
+          <p:cNvPr id="260" name=""/>
           <p:cNvCxnSpPr>
             <a:stCxn xmlns:a="http://schemas.openxmlformats.org/drawingml/2006/main" id="17" idx="2"/>
             <a:endCxn xmlns:a="http://schemas.openxmlformats.org/drawingml/2006/main" id="18" idx="0"/>
@@ -3661,7 +3877,7 @@
       </p:cxnSp>
       <p:cxnSp>
         <p:nvCxnSpPr>
-          <p:cNvPr id="65" name=""/>
+          <p:cNvPr id="261" name=""/>
           <p:cNvCxnSpPr>
             <a:stCxn xmlns:a="http://schemas.openxmlformats.org/drawingml/2006/main" id="17" idx="3"/>
             <a:endCxn xmlns:a="http://schemas.openxmlformats.org/drawingml/2006/main" id="19" idx="3"/>
@@ -3689,7 +3905,7 @@
       </p:cxnSp>
       <p:cxnSp>
         <p:nvCxnSpPr>
-          <p:cNvPr id="66" name=""/>
+          <p:cNvPr id="262" name=""/>
           <p:cNvCxnSpPr>
             <a:stCxn xmlns:a="http://schemas.openxmlformats.org/drawingml/2006/main" id="19" idx="1"/>
             <a:endCxn xmlns:a="http://schemas.openxmlformats.org/drawingml/2006/main" id="14" idx="3"/>
@@ -3698,8 +3914,8 @@
         </p:nvCxnSpPr>
         <p:spPr>
           <a:xfrm xmlns:a="http://schemas.openxmlformats.org/drawingml/2006/main" flipH="1">
-            <a:off x="8667750" y="5086350"/>
-            <a:ext cx="647700" cy="47625"/>
+            <a:off x="8839200" y="5086350"/>
+            <a:ext cx="476250" cy="47625"/>
           </a:xfrm>
           <a:prstGeom xmlns:a="http://schemas.openxmlformats.org/drawingml/2006/main" prst="bentConnector3">
             <a:avLst>
@@ -3754,13 +3970,14 @@
           <a:lstStyle xmlns:a="http://schemas.openxmlformats.org/drawingml/2006/main"/>
           <a:p xmlns:a="http://schemas.openxmlformats.org/drawingml/2006/main">
             <a:pPr algn="ctr">
+              <a:buNone/>
               <a:defRPr sz="1613" b="1">
                 <a:solidFill>
                   <a:srgbClr val="3D8DFF"/>
                 </a:solidFill>
-                <a:latin typeface="Helvetica Neue"/>
-                <a:ea typeface="Helvetica Neue"/>
-                <a:cs typeface="Helvetica Neue"/>
+                <a:latin typeface="Arial"/>
+                <a:ea typeface="Arial"/>
+                <a:cs typeface="Arial"/>
               </a:defRPr>
             </a:pPr>
             <a:r>
@@ -3768,9 +3985,9 @@
                 <a:solidFill>
                   <a:srgbClr val="3D8DFF"/>
                 </a:solidFill>
-                <a:latin typeface="Helvetica Neue"/>
-                <a:ea typeface="Helvetica Neue"/>
-                <a:cs typeface="Helvetica Neue"/>
+                <a:latin typeface="Arial"/>
+                <a:ea typeface="Arial"/>
+                <a:cs typeface="Arial"/>
               </a:rPr>
               <a:t>Nightly snapshot</a:t>
             </a:r>
@@ -3816,13 +4033,14 @@
           <a:lstStyle xmlns:a="http://schemas.openxmlformats.org/drawingml/2006/main"/>
           <a:p xmlns:a="http://schemas.openxmlformats.org/drawingml/2006/main">
             <a:pPr algn="ctr">
+              <a:buNone/>
               <a:defRPr sz="1613" b="1">
                 <a:solidFill>
                   <a:srgbClr val="3D8DFF"/>
                 </a:solidFill>
-                <a:latin typeface="Helvetica Neue"/>
-                <a:ea typeface="Helvetica Neue"/>
-                <a:cs typeface="Helvetica Neue"/>
+                <a:latin typeface="Arial"/>
+                <a:ea typeface="Arial"/>
+                <a:cs typeface="Arial"/>
               </a:defRPr>
             </a:pPr>
             <a:r>
@@ -3830,9 +4048,9 @@
                 <a:solidFill>
                   <a:srgbClr val="3D8DFF"/>
                 </a:solidFill>
-                <a:latin typeface="Helvetica Neue"/>
-                <a:ea typeface="Helvetica Neue"/>
-                <a:cs typeface="Helvetica Neue"/>
+                <a:latin typeface="Arial"/>
+                <a:ea typeface="Arial"/>
+                <a:cs typeface="Arial"/>
               </a:rPr>
               <a:t>Validate + features</a:t>
             </a:r>
@@ -3878,13 +4096,14 @@
           <a:lstStyle xmlns:a="http://schemas.openxmlformats.org/drawingml/2006/main"/>
           <a:p xmlns:a="http://schemas.openxmlformats.org/drawingml/2006/main">
             <a:pPr algn="ctr">
+              <a:buNone/>
               <a:defRPr sz="1613" b="1">
                 <a:solidFill>
                   <a:srgbClr val="3D8DFF"/>
                 </a:solidFill>
-                <a:latin typeface="Helvetica Neue"/>
-                <a:ea typeface="Helvetica Neue"/>
-                <a:cs typeface="Helvetica Neue"/>
+                <a:latin typeface="Arial"/>
+                <a:ea typeface="Arial"/>
+                <a:cs typeface="Arial"/>
               </a:defRPr>
             </a:pPr>
             <a:r>
@@ -3892,9 +4111,9 @@
                 <a:solidFill>
                   <a:srgbClr val="3D8DFF"/>
                 </a:solidFill>
-                <a:latin typeface="Helvetica Neue"/>
-                <a:ea typeface="Helvetica Neue"/>
-                <a:cs typeface="Helvetica Neue"/>
+                <a:latin typeface="Arial"/>
+                <a:ea typeface="Arial"/>
+                <a:cs typeface="Arial"/>
               </a:rPr>
               <a:t>Statistical forecast ML</a:t>
             </a:r>
@@ -3940,13 +4159,14 @@
           <a:lstStyle xmlns:a="http://schemas.openxmlformats.org/drawingml/2006/main"/>
           <a:p xmlns:a="http://schemas.openxmlformats.org/drawingml/2006/main">
             <a:pPr algn="ctr">
+              <a:buNone/>
               <a:defRPr sz="1613" b="1">
                 <a:solidFill>
                   <a:srgbClr val="3D8DFF"/>
                 </a:solidFill>
-                <a:latin typeface="Helvetica Neue"/>
-                <a:ea typeface="Helvetica Neue"/>
-                <a:cs typeface="Helvetica Neue"/>
+                <a:latin typeface="Arial"/>
+                <a:ea typeface="Arial"/>
+                <a:cs typeface="Arial"/>
               </a:defRPr>
             </a:pPr>
             <a:r>
@@ -3954,9 +4174,9 @@
                 <a:solidFill>
                   <a:srgbClr val="3D8DFF"/>
                 </a:solidFill>
-                <a:latin typeface="Helvetica Neue"/>
-                <a:ea typeface="Helvetica Neue"/>
-                <a:cs typeface="Helvetica Neue"/>
+                <a:latin typeface="Arial"/>
+                <a:ea typeface="Arial"/>
+                <a:cs typeface="Arial"/>
               </a:rPr>
               <a:t>Deterministic optimizer</a:t>
             </a:r>
@@ -3979,8 +4199,8 @@
         </p:nvSpPr>
         <p:spPr>
           <a:xfrm xmlns:a="http://schemas.openxmlformats.org/drawingml/2006/main">
-            <a:off x="6629400" y="4857750"/>
-            <a:ext cx="2038350" cy="552450"/>
+            <a:off x="6457950" y="4857750"/>
+            <a:ext cx="2381250" cy="552450"/>
           </a:xfrm>
           <a:prstGeom xmlns:a="http://schemas.openxmlformats.org/drawingml/2006/main" prst="roundRect">
             <a:avLst>
@@ -4002,13 +4222,14 @@
           <a:lstStyle xmlns:a="http://schemas.openxmlformats.org/drawingml/2006/main"/>
           <a:p xmlns:a="http://schemas.openxmlformats.org/drawingml/2006/main">
             <a:pPr algn="ctr">
+              <a:buNone/>
               <a:defRPr sz="1613" b="1">
                 <a:solidFill>
                   <a:srgbClr val="FFFFFF"/>
                 </a:solidFill>
-                <a:latin typeface="Helvetica Neue"/>
-                <a:ea typeface="Helvetica Neue"/>
-                <a:cs typeface="Helvetica Neue"/>
+                <a:latin typeface="Arial"/>
+                <a:ea typeface="Arial"/>
+                <a:cs typeface="Arial"/>
               </a:defRPr>
             </a:pPr>
             <a:r>
@@ -4016,22 +4237,23 @@
                 <a:solidFill>
                   <a:srgbClr val="FFFFFF"/>
                 </a:solidFill>
-                <a:latin typeface="Helvetica Neue"/>
-                <a:ea typeface="Helvetica Neue"/>
-                <a:cs typeface="Helvetica Neue"/>
+                <a:latin typeface="Arial"/>
+                <a:ea typeface="Arial"/>
+                <a:cs typeface="Arial"/>
               </a:rPr>
               <a:t>Certified adapters</a:t>
             </a:r>
           </a:p>
           <a:p xmlns:a="http://schemas.openxmlformats.org/drawingml/2006/main">
             <a:pPr algn="ctr">
+              <a:buNone/>
               <a:defRPr sz="1613" b="1">
                 <a:solidFill>
                   <a:srgbClr val="FFFFFF"/>
                 </a:solidFill>
-                <a:latin typeface="Helvetica Neue"/>
-                <a:ea typeface="Helvetica Neue"/>
-                <a:cs typeface="Helvetica Neue"/>
+                <a:latin typeface="Arial"/>
+                <a:ea typeface="Arial"/>
+                <a:cs typeface="Arial"/>
               </a:defRPr>
             </a:pPr>
             <a:r>
@@ -4039,9 +4261,9 @@
                 <a:solidFill>
                   <a:srgbClr val="FFFFFF"/>
                 </a:solidFill>
-                <a:latin typeface="Helvetica Neue"/>
-                <a:ea typeface="Helvetica Neue"/>
-                <a:cs typeface="Helvetica Neue"/>
+                <a:latin typeface="Arial"/>
+                <a:ea typeface="Arial"/>
+                <a:cs typeface="Arial"/>
               </a:rPr>
               <a:t>write + post-gen join</a:t>
             </a:r>
@@ -4087,13 +4309,14 @@
           <a:lstStyle xmlns:a="http://schemas.openxmlformats.org/drawingml/2006/main"/>
           <a:p xmlns:a="http://schemas.openxmlformats.org/drawingml/2006/main">
             <a:pPr algn="ctr">
+              <a:buNone/>
               <a:defRPr sz="1613" b="1">
                 <a:solidFill>
                   <a:srgbClr val="586174"/>
                 </a:solidFill>
-                <a:latin typeface="Helvetica Neue"/>
-                <a:ea typeface="Helvetica Neue"/>
-                <a:cs typeface="Helvetica Neue"/>
+                <a:latin typeface="Arial"/>
+                <a:ea typeface="Arial"/>
+                <a:cs typeface="Arial"/>
               </a:defRPr>
             </a:pPr>
             <a:r>
@@ -4101,9 +4324,9 @@
                 <a:solidFill>
                   <a:srgbClr val="586174"/>
                 </a:solidFill>
-                <a:latin typeface="Helvetica Neue"/>
-                <a:ea typeface="Helvetica Neue"/>
-                <a:cs typeface="Helvetica Neue"/>
+                <a:latin typeface="Arial"/>
+                <a:ea typeface="Arial"/>
+                <a:cs typeface="Arial"/>
               </a:rPr>
               <a:t>POS isolated</a:t>
             </a:r>
@@ -4149,13 +4372,14 @@
           <a:lstStyle xmlns:a="http://schemas.openxmlformats.org/drawingml/2006/main"/>
           <a:p xmlns:a="http://schemas.openxmlformats.org/drawingml/2006/main">
             <a:pPr algn="ctr">
+              <a:buNone/>
               <a:defRPr sz="1613" b="1">
                 <a:solidFill>
                   <a:srgbClr val="000000"/>
                 </a:solidFill>
-                <a:latin typeface="Helvetica Neue"/>
-                <a:ea typeface="Helvetica Neue"/>
-                <a:cs typeface="Helvetica Neue"/>
+                <a:latin typeface="Arial"/>
+                <a:ea typeface="Arial"/>
+                <a:cs typeface="Arial"/>
               </a:defRPr>
             </a:pPr>
             <a:r>
@@ -4163,9 +4387,9 @@
                 <a:solidFill>
                   <a:srgbClr val="000000"/>
                 </a:solidFill>
-                <a:latin typeface="Helvetica Neue"/>
-                <a:ea typeface="Helvetica Neue"/>
-                <a:cs typeface="Helvetica Neue"/>
+                <a:latin typeface="Arial"/>
+                <a:ea typeface="Arial"/>
+                <a:cs typeface="Arial"/>
               </a:rPr>
               <a:t>Override table</a:t>
             </a:r>
@@ -4211,13 +4435,14 @@
           <a:lstStyle xmlns:a="http://schemas.openxmlformats.org/drawingml/2006/main"/>
           <a:p xmlns:a="http://schemas.openxmlformats.org/drawingml/2006/main">
             <a:pPr algn="ctr">
+              <a:buNone/>
               <a:defRPr sz="1613" b="1">
                 <a:solidFill>
                   <a:srgbClr val="FFFFFF"/>
                 </a:solidFill>
-                <a:latin typeface="Helvetica Neue"/>
-                <a:ea typeface="Helvetica Neue"/>
-                <a:cs typeface="Helvetica Neue"/>
+                <a:latin typeface="Arial"/>
+                <a:ea typeface="Arial"/>
+                <a:cs typeface="Arial"/>
               </a:defRPr>
             </a:pPr>
             <a:r>
@@ -4225,9 +4450,9 @@
                 <a:solidFill>
                   <a:srgbClr val="FFFFFF"/>
                 </a:solidFill>
-                <a:latin typeface="Helvetica Neue"/>
-                <a:ea typeface="Helvetica Neue"/>
-                <a:cs typeface="Helvetica Neue"/>
+                <a:latin typeface="Arial"/>
+                <a:ea typeface="Arial"/>
+                <a:cs typeface="Arial"/>
               </a:rPr>
               <a:t>MERLIN engine</a:t>
             </a:r>
@@ -4273,13 +4498,14 @@
           <a:lstStyle xmlns:a="http://schemas.openxmlformats.org/drawingml/2006/main"/>
           <a:p xmlns:a="http://schemas.openxmlformats.org/drawingml/2006/main">
             <a:pPr algn="ctr">
+              <a:buNone/>
               <a:defRPr sz="1613" b="1">
                 <a:solidFill>
                   <a:srgbClr val="000000"/>
                 </a:solidFill>
-                <a:latin typeface="Helvetica Neue"/>
-                <a:ea typeface="Helvetica Neue"/>
-                <a:cs typeface="Helvetica Neue"/>
+                <a:latin typeface="Arial"/>
+                <a:ea typeface="Arial"/>
+                <a:cs typeface="Arial"/>
               </a:defRPr>
             </a:pPr>
             <a:r>
@@ -4287,9 +4513,9 @@
                 <a:solidFill>
                   <a:srgbClr val="000000"/>
                 </a:solidFill>
-                <a:latin typeface="Helvetica Neue"/>
-                <a:ea typeface="Helvetica Neue"/>
-                <a:cs typeface="Helvetica Neue"/>
+                <a:latin typeface="Arial"/>
+                <a:ea typeface="Arial"/>
+                <a:cs typeface="Arial"/>
               </a:rPr>
               <a:t>Review queue</a:t>
             </a:r>
@@ -4335,13 +4561,14 @@
           <a:lstStyle xmlns:a="http://schemas.openxmlformats.org/drawingml/2006/main"/>
           <a:p xmlns:a="http://schemas.openxmlformats.org/drawingml/2006/main">
             <a:pPr algn="ctr">
+              <a:buNone/>
               <a:defRPr sz="1613" b="1">
                 <a:solidFill>
                   <a:srgbClr val="000000"/>
                 </a:solidFill>
-                <a:latin typeface="Helvetica Neue"/>
-                <a:ea typeface="Helvetica Neue"/>
-                <a:cs typeface="Helvetica Neue"/>
+                <a:latin typeface="Arial"/>
+                <a:ea typeface="Arial"/>
+                <a:cs typeface="Arial"/>
               </a:defRPr>
             </a:pPr>
             <a:r>
@@ -4349,22 +4576,23 @@
                 <a:solidFill>
                   <a:srgbClr val="000000"/>
                 </a:solidFill>
-                <a:latin typeface="Helvetica Neue"/>
-                <a:ea typeface="Helvetica Neue"/>
-                <a:cs typeface="Helvetica Neue"/>
+                <a:latin typeface="Arial"/>
+                <a:ea typeface="Arial"/>
+                <a:cs typeface="Arial"/>
               </a:rPr>
               <a:t>EDI → suppliers</a:t>
             </a:r>
           </a:p>
           <a:p xmlns:a="http://schemas.openxmlformats.org/drawingml/2006/main">
             <a:pPr algn="ctr">
+              <a:buNone/>
               <a:defRPr sz="1613" b="1">
                 <a:solidFill>
                   <a:srgbClr val="000000"/>
                 </a:solidFill>
-                <a:latin typeface="Helvetica Neue"/>
-                <a:ea typeface="Helvetica Neue"/>
-                <a:cs typeface="Helvetica Neue"/>
+                <a:latin typeface="Arial"/>
+                <a:ea typeface="Arial"/>
+                <a:cs typeface="Arial"/>
               </a:defRPr>
             </a:pPr>
             <a:r>
@@ -4372,9 +4600,9 @@
                 <a:solidFill>
                   <a:srgbClr val="000000"/>
                 </a:solidFill>
-                <a:latin typeface="Helvetica Neue"/>
-                <a:ea typeface="Helvetica Neue"/>
-                <a:cs typeface="Helvetica Neue"/>
+                <a:latin typeface="Arial"/>
+                <a:ea typeface="Arial"/>
+                <a:cs typeface="Arial"/>
               </a:rPr>
               <a:t>MERLIN only</a:t>
             </a:r>
@@ -4440,16 +4668,25 @@
           <a:lstStyle xmlns:a="http://schemas.openxmlformats.org/drawingml/2006/main"/>
           <a:p xmlns:a="http://schemas.openxmlformats.org/drawingml/2006/main">
             <a:pPr algn="l">
+              <a:buNone/>
               <a:defRPr sz="3600" b="1">
                 <a:solidFill>
                   <a:srgbClr val="000000"/>
                 </a:solidFill>
-                <a:latin typeface="Helvetica Neue"/>
-                <a:ea typeface="Helvetica Neue"/>
-                <a:cs typeface="Helvetica Neue"/>
-              </a:defRPr>
-            </a:pPr>
-            <a:r>
+                <a:latin typeface="Arial"/>
+                <a:ea typeface="Arial"/>
+                <a:cs typeface="Arial"/>
+              </a:defRPr>
+            </a:pPr>
+            <a:r>
+              <a:rPr sz="3600" b="1">
+                <a:solidFill>
+                  <a:srgbClr val="000000"/>
+                </a:solidFill>
+                <a:latin typeface="Arial"/>
+                <a:ea typeface="Arial"/>
+                <a:cs typeface="Arial"/>
+              </a:rPr>
               <a:t>AI closes at 02:00 to protect the immovable 04:00 cut-off</a:t>
             </a:r>
           </a:p>
@@ -4716,16 +4953,25 @@
           <a:lstStyle xmlns:a="http://schemas.openxmlformats.org/drawingml/2006/main"/>
           <a:p xmlns:a="http://schemas.openxmlformats.org/drawingml/2006/main">
             <a:pPr algn="ctr">
+              <a:buNone/>
               <a:defRPr sz="1650" b="1">
                 <a:solidFill>
                   <a:srgbClr val="000000"/>
                 </a:solidFill>
-                <a:latin typeface="Helvetica Neue"/>
-                <a:ea typeface="Helvetica Neue"/>
-                <a:cs typeface="Helvetica Neue"/>
-              </a:defRPr>
-            </a:pPr>
-            <a:r>
+                <a:latin typeface="Arial"/>
+                <a:ea typeface="Arial"/>
+                <a:cs typeface="Arial"/>
+              </a:defRPr>
+            </a:pPr>
+            <a:r>
+              <a:rPr sz="1650" b="1">
+                <a:solidFill>
+                  <a:srgbClr val="000000"/>
+                </a:solidFill>
+                <a:latin typeface="Arial"/>
+                <a:ea typeface="Arial"/>
+                <a:cs typeface="Arial"/>
+              </a:rPr>
               <a:t>22:00–22:20</a:t>
             </a:r>
           </a:p>
@@ -4761,16 +5007,25 @@
           <a:lstStyle xmlns:a="http://schemas.openxmlformats.org/drawingml/2006/main"/>
           <a:p xmlns:a="http://schemas.openxmlformats.org/drawingml/2006/main">
             <a:pPr algn="ctr">
+              <a:buNone/>
               <a:defRPr sz="1650" b="1">
                 <a:solidFill>
                   <a:srgbClr val="000000"/>
                 </a:solidFill>
-                <a:latin typeface="Helvetica Neue"/>
-                <a:ea typeface="Helvetica Neue"/>
-                <a:cs typeface="Helvetica Neue"/>
-              </a:defRPr>
-            </a:pPr>
-            <a:r>
+                <a:latin typeface="Arial"/>
+                <a:ea typeface="Arial"/>
+                <a:cs typeface="Arial"/>
+              </a:defRPr>
+            </a:pPr>
+            <a:r>
+              <a:rPr sz="1650" b="1">
+                <a:solidFill>
+                  <a:srgbClr val="000000"/>
+                </a:solidFill>
+                <a:latin typeface="Arial"/>
+                <a:ea typeface="Arial"/>
+                <a:cs typeface="Arial"/>
+              </a:rPr>
               <a:t>22:20–00:20</a:t>
             </a:r>
           </a:p>
@@ -4806,16 +5061,25 @@
           <a:lstStyle xmlns:a="http://schemas.openxmlformats.org/drawingml/2006/main"/>
           <a:p xmlns:a="http://schemas.openxmlformats.org/drawingml/2006/main">
             <a:pPr algn="ctr">
+              <a:buNone/>
               <a:defRPr sz="1650" b="1">
                 <a:solidFill>
                   <a:srgbClr val="000000"/>
                 </a:solidFill>
-                <a:latin typeface="Helvetica Neue"/>
-                <a:ea typeface="Helvetica Neue"/>
-                <a:cs typeface="Helvetica Neue"/>
-              </a:defRPr>
-            </a:pPr>
-            <a:r>
+                <a:latin typeface="Arial"/>
+                <a:ea typeface="Arial"/>
+                <a:cs typeface="Arial"/>
+              </a:defRPr>
+            </a:pPr>
+            <a:r>
+              <a:rPr sz="1650" b="1">
+                <a:solidFill>
+                  <a:srgbClr val="000000"/>
+                </a:solidFill>
+                <a:latin typeface="Arial"/>
+                <a:ea typeface="Arial"/>
+                <a:cs typeface="Arial"/>
+              </a:rPr>
               <a:t>00:20–01:20</a:t>
             </a:r>
           </a:p>
@@ -4851,16 +5115,25 @@
           <a:lstStyle xmlns:a="http://schemas.openxmlformats.org/drawingml/2006/main"/>
           <a:p xmlns:a="http://schemas.openxmlformats.org/drawingml/2006/main">
             <a:pPr algn="ctr">
+              <a:buNone/>
               <a:defRPr sz="1650" b="1">
                 <a:solidFill>
                   <a:srgbClr val="000000"/>
                 </a:solidFill>
-                <a:latin typeface="Helvetica Neue"/>
-                <a:ea typeface="Helvetica Neue"/>
-                <a:cs typeface="Helvetica Neue"/>
-              </a:defRPr>
-            </a:pPr>
-            <a:r>
+                <a:latin typeface="Arial"/>
+                <a:ea typeface="Arial"/>
+                <a:cs typeface="Arial"/>
+              </a:defRPr>
+            </a:pPr>
+            <a:r>
+              <a:rPr sz="1650" b="1">
+                <a:solidFill>
+                  <a:srgbClr val="000000"/>
+                </a:solidFill>
+                <a:latin typeface="Arial"/>
+                <a:ea typeface="Arial"/>
+                <a:cs typeface="Arial"/>
+              </a:rPr>
               <a:t>01:20–02:00</a:t>
             </a:r>
           </a:p>
@@ -4896,16 +5169,25 @@
           <a:lstStyle xmlns:a="http://schemas.openxmlformats.org/drawingml/2006/main"/>
           <a:p xmlns:a="http://schemas.openxmlformats.org/drawingml/2006/main">
             <a:pPr algn="ctr">
+              <a:buNone/>
               <a:defRPr sz="1650" b="1">
                 <a:solidFill>
                   <a:srgbClr val="000000"/>
                 </a:solidFill>
-                <a:latin typeface="Helvetica Neue"/>
-                <a:ea typeface="Helvetica Neue"/>
-                <a:cs typeface="Helvetica Neue"/>
-              </a:defRPr>
-            </a:pPr>
-            <a:r>
+                <a:latin typeface="Arial"/>
+                <a:ea typeface="Arial"/>
+                <a:cs typeface="Arial"/>
+              </a:defRPr>
+            </a:pPr>
+            <a:r>
+              <a:rPr sz="1650" b="1">
+                <a:solidFill>
+                  <a:srgbClr val="000000"/>
+                </a:solidFill>
+                <a:latin typeface="Arial"/>
+                <a:ea typeface="Arial"/>
+                <a:cs typeface="Arial"/>
+              </a:rPr>
               <a:t>02:00–04:00</a:t>
             </a:r>
           </a:p>
@@ -4976,16 +5258,25 @@
           <a:lstStyle xmlns:a="http://schemas.openxmlformats.org/drawingml/2006/main"/>
           <a:p xmlns:a="http://schemas.openxmlformats.org/drawingml/2006/main">
             <a:pPr algn="ctr">
+              <a:buNone/>
               <a:defRPr sz="1613" b="1">
                 <a:solidFill>
                   <a:srgbClr val="3D8DFF"/>
                 </a:solidFill>
-                <a:latin typeface="Helvetica Neue"/>
-                <a:ea typeface="Helvetica Neue"/>
-                <a:cs typeface="Helvetica Neue"/>
-              </a:defRPr>
-            </a:pPr>
-            <a:r>
+                <a:latin typeface="Arial"/>
+                <a:ea typeface="Arial"/>
+                <a:cs typeface="Arial"/>
+              </a:defRPr>
+            </a:pPr>
+            <a:r>
+              <a:rPr sz="1613" b="1">
+                <a:solidFill>
+                  <a:srgbClr val="3D8DFF"/>
+                </a:solidFill>
+                <a:latin typeface="Arial"/>
+                <a:ea typeface="Arial"/>
+                <a:cs typeface="Arial"/>
+              </a:rPr>
               <a:t>Validate immutable
 snapshot</a:t>
             </a:r>
@@ -5057,16 +5348,25 @@
           <a:lstStyle xmlns:a="http://schemas.openxmlformats.org/drawingml/2006/main"/>
           <a:p xmlns:a="http://schemas.openxmlformats.org/drawingml/2006/main">
             <a:pPr algn="ctr">
+              <a:buNone/>
               <a:defRPr sz="1613" b="1">
                 <a:solidFill>
                   <a:srgbClr val="000000"/>
                 </a:solidFill>
-                <a:latin typeface="Helvetica Neue"/>
-                <a:ea typeface="Helvetica Neue"/>
-                <a:cs typeface="Helvetica Neue"/>
-              </a:defRPr>
-            </a:pPr>
-            <a:r>
+                <a:latin typeface="Arial"/>
+                <a:ea typeface="Arial"/>
+                <a:cs typeface="Arial"/>
+              </a:defRPr>
+            </a:pPr>
+            <a:r>
+              <a:rPr sz="1613" b="1">
+                <a:solidFill>
+                  <a:srgbClr val="000000"/>
+                </a:solidFill>
+                <a:latin typeface="Arial"/>
+                <a:ea typeface="Arial"/>
+                <a:cs typeface="Arial"/>
+              </a:rPr>
               <a:t>Statistical
 forecasts</a:t>
             </a:r>
@@ -5138,16 +5438,25 @@
           <a:lstStyle xmlns:a="http://schemas.openxmlformats.org/drawingml/2006/main"/>
           <a:p xmlns:a="http://schemas.openxmlformats.org/drawingml/2006/main">
             <a:pPr algn="ctr">
+              <a:buNone/>
               <a:defRPr sz="1613" b="1">
                 <a:solidFill>
                   <a:srgbClr val="000000"/>
                 </a:solidFill>
-                <a:latin typeface="Helvetica Neue"/>
-                <a:ea typeface="Helvetica Neue"/>
-                <a:cs typeface="Helvetica Neue"/>
-              </a:defRPr>
-            </a:pPr>
-            <a:r>
+                <a:latin typeface="Arial"/>
+                <a:ea typeface="Arial"/>
+                <a:cs typeface="Arial"/>
+              </a:defRPr>
+            </a:pPr>
+            <a:r>
+              <a:rPr sz="1613" b="1">
+                <a:solidFill>
+                  <a:srgbClr val="000000"/>
+                </a:solidFill>
+                <a:latin typeface="Arial"/>
+                <a:ea typeface="Arial"/>
+                <a:cs typeface="Arial"/>
+              </a:rPr>
               <a:t>Deterministic
 optimization</a:t>
             </a:r>
@@ -5219,16 +5528,25 @@
           <a:lstStyle xmlns:a="http://schemas.openxmlformats.org/drawingml/2006/main"/>
           <a:p xmlns:a="http://schemas.openxmlformats.org/drawingml/2006/main">
             <a:pPr algn="ctr">
+              <a:buNone/>
               <a:defRPr sz="1613" b="1">
                 <a:solidFill>
                   <a:srgbClr val="3D8DFF"/>
                 </a:solidFill>
-                <a:latin typeface="Helvetica Neue"/>
-                <a:ea typeface="Helvetica Neue"/>
-                <a:cs typeface="Helvetica Neue"/>
-              </a:defRPr>
-            </a:pPr>
-            <a:r>
+                <a:latin typeface="Arial"/>
+                <a:ea typeface="Arial"/>
+                <a:cs typeface="Arial"/>
+              </a:defRPr>
+            </a:pPr>
+            <a:r>
+              <a:rPr sz="1613" b="1">
+                <a:solidFill>
+                  <a:srgbClr val="3D8DFF"/>
+                </a:solidFill>
+                <a:latin typeface="Arial"/>
+                <a:ea typeface="Arial"/>
+                <a:cs typeface="Arial"/>
+              </a:rPr>
               <a:t>Reconcile, sign,
 and publish</a:t>
             </a:r>
@@ -5286,8 +5604,8 @@
         </p:nvSpPr>
         <p:spPr>
           <a:xfrm xmlns:a="http://schemas.openxmlformats.org/drawingml/2006/main">
-            <a:off x="9723120" y="4819650"/>
-            <a:ext cx="1859280" cy="400050"/>
+            <a:off x="9627870" y="4772025"/>
+            <a:ext cx="2049780" cy="476250"/>
           </a:xfrm>
           <a:prstGeom xmlns:a="http://schemas.openxmlformats.org/drawingml/2006/main" prst="rect">
             <a:avLst/>
@@ -5300,16 +5618,25 @@
           <a:lstStyle xmlns:a="http://schemas.openxmlformats.org/drawingml/2006/main"/>
           <a:p xmlns:a="http://schemas.openxmlformats.org/drawingml/2006/main">
             <a:pPr algn="ctr">
+              <a:buNone/>
               <a:defRPr sz="1613" b="1">
                 <a:solidFill>
                   <a:srgbClr val="FFFFFF"/>
                 </a:solidFill>
-                <a:latin typeface="Helvetica Neue"/>
-                <a:ea typeface="Helvetica Neue"/>
-                <a:cs typeface="Helvetica Neue"/>
-              </a:defRPr>
-            </a:pPr>
-            <a:r>
+                <a:latin typeface="Arial"/>
+                <a:ea typeface="Arial"/>
+                <a:cs typeface="Arial"/>
+              </a:defRPr>
+            </a:pPr>
+            <a:r>
+              <a:rPr sz="1613" b="1">
+                <a:solidFill>
+                  <a:srgbClr val="FFFFFF"/>
+                </a:solidFill>
+                <a:latin typeface="Arial"/>
+                <a:ea typeface="Arial"/>
+                <a:cs typeface="Arial"/>
+              </a:rPr>
               <a:t>MERLIN generation,
 review, and EDI</a:t>
             </a:r>
@@ -5346,16 +5673,25 @@
           <a:lstStyle xmlns:a="http://schemas.openxmlformats.org/drawingml/2006/main"/>
           <a:p xmlns:a="http://schemas.openxmlformats.org/drawingml/2006/main">
             <a:pPr algn="ctr">
+              <a:buNone/>
               <a:defRPr sz="1350" b="1">
                 <a:solidFill>
                   <a:srgbClr val="3D8DFF"/>
                 </a:solidFill>
-                <a:latin typeface="Helvetica Neue"/>
-                <a:ea typeface="Helvetica Neue"/>
-                <a:cs typeface="Helvetica Neue"/>
-              </a:defRPr>
-            </a:pPr>
-            <a:r>
+                <a:latin typeface="Arial"/>
+                <a:ea typeface="Arial"/>
+                <a:cs typeface="Arial"/>
+              </a:defRPr>
+            </a:pPr>
+            <a:r>
+              <a:rPr sz="1350" b="1">
+                <a:solidFill>
+                  <a:srgbClr val="3D8DFF"/>
+                </a:solidFill>
+                <a:latin typeface="Arial"/>
+                <a:ea typeface="Arial"/>
+                <a:cs typeface="Arial"/>
+              </a:rPr>
               <a:t>01:30 retry stop
 01:45 complete-set gate
 02:00 write close</a:t>
@@ -5414,8 +5750,8 @@
         </p:nvSpPr>
         <p:spPr>
           <a:xfrm xmlns:a="http://schemas.openxmlformats.org/drawingml/2006/main">
-            <a:off x="685800" y="5676900"/>
-            <a:ext cx="10820400" cy="285750"/>
+            <a:off x="685800" y="5600700"/>
+            <a:ext cx="10820400" cy="419100"/>
           </a:xfrm>
           <a:prstGeom xmlns:a="http://schemas.openxmlformats.org/drawingml/2006/main" prst="rect">
             <a:avLst/>
@@ -5428,16 +5764,25 @@
           <a:lstStyle xmlns:a="http://schemas.openxmlformats.org/drawingml/2006/main"/>
           <a:p xmlns:a="http://schemas.openxmlformats.org/drawingml/2006/main">
             <a:pPr algn="ctr">
+              <a:buNone/>
               <a:defRPr sz="1650" b="1">
                 <a:solidFill>
                   <a:srgbClr val="000000"/>
                 </a:solidFill>
-                <a:latin typeface="Helvetica Neue"/>
-                <a:ea typeface="Helvetica Neue"/>
-                <a:cs typeface="Helvetica Neue"/>
-              </a:defRPr>
-            </a:pPr>
-            <a:r>
+                <a:latin typeface="Arial"/>
+                <a:ea typeface="Arial"/>
+                <a:cs typeface="Arial"/>
+              </a:defRPr>
+            </a:pPr>
+            <a:r>
+              <a:rPr sz="1650" b="1">
+                <a:solidFill>
+                  <a:srgbClr val="000000"/>
+                </a:solidFill>
+                <a:latin typeface="Arial"/>
+                <a:ea typeface="Arial"/>
+                <a:cs typeface="Arial"/>
+              </a:rPr>
               <a:t>Any late, incomplete, stale, uncertain, expired-permit, or failed transaction → publish nothing; MERLIN continues</a:t>
             </a:r>
           </a:p>
@@ -5473,16 +5818,25 @@
           <a:lstStyle xmlns:a="http://schemas.openxmlformats.org/drawingml/2006/main"/>
           <a:p xmlns:a="http://schemas.openxmlformats.org/drawingml/2006/main">
             <a:pPr algn="l">
+              <a:buNone/>
               <a:defRPr sz="1200">
                 <a:solidFill>
                   <a:srgbClr val="586174"/>
                 </a:solidFill>
-                <a:latin typeface="Helvetica Neue"/>
-                <a:ea typeface="Helvetica Neue"/>
-                <a:cs typeface="Helvetica Neue"/>
-              </a:defRPr>
-            </a:pPr>
-            <a:r>
+                <a:latin typeface="Arial"/>
+                <a:ea typeface="Arial"/>
+                <a:cs typeface="Arial"/>
+              </a:defRPr>
+            </a:pPr>
+            <a:r>
+              <a:rPr sz="1200">
+                <a:solidFill>
+                  <a:srgbClr val="586174"/>
+                </a:solidFill>
+                <a:latin typeface="Arial"/>
+                <a:ea typeface="Arial"/>
+                <a:cs typeface="Arial"/>
+              </a:rPr>
               <a:t>Owner: LÊ NGUYỄN SỸ BÌNH (122980)</a:t>
             </a:r>
           </a:p>
@@ -5518,16 +5872,25 @@
           <a:lstStyle xmlns:a="http://schemas.openxmlformats.org/drawingml/2006/main"/>
           <a:p xmlns:a="http://schemas.openxmlformats.org/drawingml/2006/main">
             <a:pPr algn="l">
+              <a:buNone/>
               <a:defRPr sz="1350">
                 <a:solidFill>
                   <a:srgbClr val="586174"/>
                 </a:solidFill>
-                <a:latin typeface="Helvetica Neue"/>
-                <a:ea typeface="Helvetica Neue"/>
-                <a:cs typeface="Helvetica Neue"/>
-              </a:defRPr>
-            </a:pPr>
-            <a:r>
+                <a:latin typeface="Arial"/>
+                <a:ea typeface="Arial"/>
+                <a:cs typeface="Arial"/>
+              </a:defRPr>
+            </a:pPr>
+            <a:r>
+              <a:rPr sz="1350">
+                <a:solidFill>
+                  <a:srgbClr val="586174"/>
+                </a:solidFill>
+                <a:latin typeface="Arial"/>
+                <a:ea typeface="Arial"/>
+                <a:cs typeface="Arial"/>
+              </a:rPr>
               <a:t>End-to-end nightly batch</a:t>
             </a:r>
           </a:p>
@@ -5563,16 +5926,25 @@
           <a:lstStyle xmlns:a="http://schemas.openxmlformats.org/drawingml/2006/main"/>
           <a:p xmlns:a="http://schemas.openxmlformats.org/drawingml/2006/main">
             <a:pPr algn="r">
+              <a:buNone/>
               <a:defRPr sz="1350">
                 <a:solidFill>
                   <a:srgbClr val="000000"/>
                 </a:solidFill>
-                <a:latin typeface="Helvetica Neue"/>
-                <a:ea typeface="Helvetica Neue"/>
-                <a:cs typeface="Helvetica Neue"/>
-              </a:defRPr>
-            </a:pPr>
-            <a:r>
+                <a:latin typeface="Arial"/>
+                <a:ea typeface="Arial"/>
+                <a:cs typeface="Arial"/>
+              </a:defRPr>
+            </a:pPr>
+            <a:r>
+              <a:rPr sz="1350">
+                <a:solidFill>
+                  <a:srgbClr val="000000"/>
+                </a:solidFill>
+                <a:latin typeface="Arial"/>
+                <a:ea typeface="Arial"/>
+                <a:cs typeface="Arial"/>
+              </a:rPr>
               <a:t>4</a:t>
             </a:r>
           </a:p>
@@ -5624,7 +5996,7 @@
         <p:spPr>
           <a:xfrm xmlns:a="http://schemas.openxmlformats.org/drawingml/2006/main">
             <a:off x="400050" y="323850"/>
-            <a:ext cx="11391900" cy="819150"/>
+            <a:ext cx="11391900" cy="990600"/>
           </a:xfrm>
           <a:prstGeom xmlns:a="http://schemas.openxmlformats.org/drawingml/2006/main" prst="rect">
             <a:avLst/>
@@ -5637,17 +6009,26 @@
           <a:lstStyle xmlns:a="http://schemas.openxmlformats.org/drawingml/2006/main"/>
           <a:p xmlns:a="http://schemas.openxmlformats.org/drawingml/2006/main">
             <a:pPr algn="l">
+              <a:buNone/>
               <a:defRPr sz="3600" b="1">
                 <a:solidFill>
                   <a:srgbClr val="000000"/>
                 </a:solidFill>
-                <a:latin typeface="Helvetica Neue"/>
-                <a:ea typeface="Helvetica Neue"/>
-                <a:cs typeface="Helvetica Neue"/>
-              </a:defRPr>
-            </a:pPr>
-            <a:r>
-              <a:t>The envelope fits on paper; production waits for proof</a:t>
+                <a:latin typeface="Arial"/>
+                <a:ea typeface="Arial"/>
+                <a:cs typeface="Arial"/>
+              </a:defRPr>
+            </a:pPr>
+            <a:r>
+              <a:rPr sz="3600" b="1">
+                <a:solidFill>
+                  <a:srgbClr val="000000"/>
+                </a:solidFill>
+                <a:latin typeface="Arial"/>
+                <a:ea typeface="Arial"/>
+                <a:cs typeface="Arial"/>
+              </a:rPr>
+              <a:t>Value and capacity fit on paper; production waits for proof</a:t>
             </a:r>
           </a:p>
         </p:txBody>
@@ -5668,7 +6049,7 @@
         </p:nvSpPr>
         <p:spPr>
           <a:xfrm xmlns:a="http://schemas.openxmlformats.org/drawingml/2006/main">
-            <a:off x="400050" y="1276350"/>
+            <a:off x="400050" y="1409700"/>
             <a:ext cx="11391900" cy="647700"/>
           </a:xfrm>
           <a:prstGeom xmlns:a="http://schemas.openxmlformats.org/drawingml/2006/main" prst="rect">
@@ -5682,17 +6063,26 @@
           <a:lstStyle xmlns:a="http://schemas.openxmlformats.org/drawingml/2006/main"/>
           <a:p xmlns:a="http://schemas.openxmlformats.org/drawingml/2006/main">
             <a:pPr algn="ctr">
+              <a:buNone/>
               <a:defRPr sz="1800" b="1">
                 <a:solidFill>
                   <a:srgbClr val="3D8DFF"/>
                 </a:solidFill>
-                <a:latin typeface="Helvetica Neue"/>
-                <a:ea typeface="Helvetica Neue"/>
-                <a:cs typeface="Helvetica Neue"/>
-              </a:defRPr>
-            </a:pPr>
-            <a:r>
-              <a:t>Publication proof: 70,400 rows / 60 s requires ≥1,173.4 rows/s raw; 1,760 rows/s with 10 s overhead and 20% headroom</a:t>
+                <a:latin typeface="Arial"/>
+                <a:ea typeface="Arial"/>
+                <a:cs typeface="Arial"/>
+              </a:defRPr>
+            </a:pPr>
+            <a:r>
+              <a:rPr sz="1800" b="1">
+                <a:solidFill>
+                  <a:srgbClr val="3D8DFF"/>
+                </a:solidFill>
+                <a:latin typeface="Arial"/>
+                <a:ea typeface="Arial"/>
+                <a:cs typeface="Arial"/>
+              </a:rPr>
+              <a:t>Business outcomes: OOS 7.2% → 3.0% • fresh waste 4.8% → 3.0% • WAPE 41% → ≤25% • lookup ~50 → &lt;15 min/shift</a:t>
             </a:r>
           </a:p>
         </p:txBody>
@@ -5713,7 +6103,7 @@
         </p:nvSpPr>
         <p:spPr>
           <a:xfrm xmlns:a="http://schemas.openxmlformats.org/drawingml/2006/main">
-            <a:off x="400050" y="2038350"/>
+            <a:off x="400050" y="2190750"/>
             <a:ext cx="11391900" cy="438150"/>
           </a:xfrm>
           <a:prstGeom xmlns:a="http://schemas.openxmlformats.org/drawingml/2006/main" prst="rect">
@@ -5727,17 +6117,26 @@
           <a:lstStyle xmlns:a="http://schemas.openxmlformats.org/drawingml/2006/main"/>
           <a:p xmlns:a="http://schemas.openxmlformats.org/drawingml/2006/main">
             <a:pPr algn="ctr">
+              <a:buNone/>
               <a:defRPr sz="1650">
                 <a:solidFill>
                   <a:srgbClr val="000000"/>
                 </a:solidFill>
-                <a:latin typeface="Helvetica Neue"/>
-                <a:ea typeface="Helvetica Neue"/>
-                <a:cs typeface="Helvetica Neue"/>
-              </a:defRPr>
-            </a:pPr>
-            <a:r>
-              <a:t>Release gates: three consecutive 6x passes  •  MERLIN P99 ≤90 min  •  certified adapter  •  observed bills + Finance approval</a:t>
+                <a:latin typeface="Arial"/>
+                <a:ea typeface="Arial"/>
+                <a:cs typeface="Arial"/>
+              </a:defRPr>
+            </a:pPr>
+            <a:r>
+              <a:rPr sz="1650">
+                <a:solidFill>
+                  <a:srgbClr val="000000"/>
+                </a:solidFill>
+                <a:latin typeface="Arial"/>
+                <a:ea typeface="Arial"/>
+                <a:cs typeface="Arial"/>
+              </a:rPr>
+              <a:t>Guardrails: retain 8,400 associates • protect 2.4% margin • no AI-driven reduction • measured gates before production</a:t>
             </a:r>
           </a:p>
         </p:txBody>
@@ -5807,16 +6206,25 @@
           <a:lstStyle xmlns:a="http://schemas.openxmlformats.org/drawingml/2006/main"/>
           <a:p xmlns:a="http://schemas.openxmlformats.org/drawingml/2006/main">
             <a:pPr algn="l">
+              <a:buNone/>
               <a:defRPr sz="3600" b="1">
                 <a:solidFill>
                   <a:srgbClr val="000000"/>
                 </a:solidFill>
-                <a:latin typeface="Helvetica Neue"/>
-                <a:ea typeface="Helvetica Neue"/>
-                <a:cs typeface="Helvetica Neue"/>
-              </a:defRPr>
-            </a:pPr>
-            <a:r>
+                <a:latin typeface="Arial"/>
+                <a:ea typeface="Arial"/>
+                <a:cs typeface="Arial"/>
+              </a:defRPr>
+            </a:pPr>
+            <a:r>
+              <a:rPr sz="3600" b="1">
+                <a:solidFill>
+                  <a:srgbClr val="000000"/>
+                </a:solidFill>
+                <a:latin typeface="Arial"/>
+                <a:ea typeface="Arial"/>
+                <a:cs typeface="Arial"/>
+              </a:rPr>
               <a:t>27M / 7.04M</a:t>
             </a:r>
           </a:p>
@@ -5852,18 +6260,50 @@
           <a:lstStyle xmlns:a="http://schemas.openxmlformats.org/drawingml/2006/main"/>
           <a:p xmlns:a="http://schemas.openxmlformats.org/drawingml/2006/main">
             <a:pPr algn="l">
+              <a:buNone/>
               <a:defRPr sz="1650">
                 <a:solidFill>
                   <a:srgbClr val="000000"/>
                 </a:solidFill>
-                <a:latin typeface="Helvetica Neue"/>
-                <a:ea typeface="Helvetica Neue"/>
-                <a:cs typeface="Helvetica Neue"/>
-              </a:defRPr>
-            </a:pPr>
-            <a:r>
-              <a:t>Forecasts / stocked candidates
-6x test: 162M / 42.24M</a:t>
+                <a:latin typeface="Arial"/>
+                <a:ea typeface="Arial"/>
+                <a:cs typeface="Arial"/>
+              </a:defRPr>
+            </a:pPr>
+            <a:r>
+              <a:rPr sz="1650">
+                <a:solidFill>
+                  <a:srgbClr val="000000"/>
+                </a:solidFill>
+                <a:latin typeface="Arial"/>
+                <a:ea typeface="Arial"/>
+                <a:cs typeface="Arial"/>
+              </a:rPr>
+              <a:t>Forecasts / stocked candidates</a:t>
+            </a:r>
+          </a:p>
+          <a:p xmlns:a="http://schemas.openxmlformats.org/drawingml/2006/main">
+            <a:pPr algn="l">
+              <a:buNone/>
+              <a:defRPr sz="1650">
+                <a:solidFill>
+                  <a:srgbClr val="000000"/>
+                </a:solidFill>
+                <a:latin typeface="Arial"/>
+                <a:ea typeface="Arial"/>
+                <a:cs typeface="Arial"/>
+              </a:defRPr>
+            </a:pPr>
+            <a:r>
+              <a:rPr sz="1650">
+                <a:solidFill>
+                  <a:srgbClr val="000000"/>
+                </a:solidFill>
+                <a:latin typeface="Arial"/>
+                <a:ea typeface="Arial"/>
+                <a:cs typeface="Arial"/>
+              </a:rPr>
+              <a:t>6×: 162M / 42.24M @ 30k/s / 15k/s</a:t>
             </a:r>
           </a:p>
         </p:txBody>
@@ -5933,17 +6373,26 @@
           <a:lstStyle xmlns:a="http://schemas.openxmlformats.org/drawingml/2006/main"/>
           <a:p xmlns:a="http://schemas.openxmlformats.org/drawingml/2006/main">
             <a:pPr algn="l">
+              <a:buNone/>
               <a:defRPr sz="3600" b="1">
                 <a:solidFill>
                   <a:srgbClr val="000000"/>
                 </a:solidFill>
-                <a:latin typeface="Helvetica Neue"/>
-                <a:ea typeface="Helvetica Neue"/>
-                <a:cs typeface="Helvetica Neue"/>
-              </a:defRPr>
-            </a:pPr>
-            <a:r>
-              <a:t>198.7 / 240</a:t>
+                <a:latin typeface="Arial"/>
+                <a:ea typeface="Arial"/>
+                <a:cs typeface="Arial"/>
+              </a:defRPr>
+            </a:pPr>
+            <a:r>
+              <a:rPr sz="3600" b="1">
+                <a:solidFill>
+                  <a:srgbClr val="000000"/>
+                </a:solidFill>
+                <a:latin typeface="Arial"/>
+                <a:ea typeface="Arial"/>
+                <a:cs typeface="Arial"/>
+              </a:rPr>
+              <a:t>32.4 / 194.4 GB</a:t>
             </a:r>
           </a:p>
         </p:txBody>
@@ -5978,18 +6427,50 @@
           <a:lstStyle xmlns:a="http://schemas.openxmlformats.org/drawingml/2006/main"/>
           <a:p xmlns:a="http://schemas.openxmlformats.org/drawingml/2006/main">
             <a:pPr algn="l">
+              <a:buNone/>
               <a:defRPr sz="1650">
                 <a:solidFill>
                   <a:srgbClr val="000000"/>
                 </a:solidFill>
-                <a:latin typeface="Helvetica Neue"/>
-                <a:ea typeface="Helvetica Neue"/>
-                <a:cs typeface="Helvetica Neue"/>
-              </a:defRPr>
-            </a:pPr>
-            <a:r>
-              <a:t>Minutes on target path
-41.3 min sidecar headroom</a:t>
+                <a:latin typeface="Arial"/>
+                <a:ea typeface="Arial"/>
+                <a:cs typeface="Arial"/>
+              </a:defRPr>
+            </a:pPr>
+            <a:r>
+              <a:rPr sz="1650">
+                <a:solidFill>
+                  <a:srgbClr val="000000"/>
+                </a:solidFill>
+                <a:latin typeface="Arial"/>
+                <a:ea typeface="Arial"/>
+                <a:cs typeface="Arial"/>
+              </a:rPr>
+              <a:t>Forecast records / run</a:t>
+            </a:r>
+          </a:p>
+          <a:p xmlns:a="http://schemas.openxmlformats.org/drawingml/2006/main">
+            <a:pPr algn="l">
+              <a:buNone/>
+              <a:defRPr sz="1650">
+                <a:solidFill>
+                  <a:srgbClr val="000000"/>
+                </a:solidFill>
+                <a:latin typeface="Arial"/>
+                <a:ea typeface="Arial"/>
+                <a:cs typeface="Arial"/>
+              </a:defRPr>
+            </a:pPr>
+            <a:r>
+              <a:rPr sz="1650">
+                <a:solidFill>
+                  <a:srgbClr val="000000"/>
+                </a:solidFill>
+                <a:latin typeface="Arial"/>
+                <a:ea typeface="Arial"/>
+                <a:cs typeface="Arial"/>
+              </a:rPr>
+              <a:t>1.2 KB assumption; retention gated</a:t>
             </a:r>
           </a:p>
         </p:txBody>
@@ -6059,16 +6540,25 @@
           <a:lstStyle xmlns:a="http://schemas.openxmlformats.org/drawingml/2006/main"/>
           <a:p xmlns:a="http://schemas.openxmlformats.org/drawingml/2006/main">
             <a:pPr algn="l">
+              <a:buNone/>
               <a:defRPr sz="3600" b="1">
                 <a:solidFill>
                   <a:srgbClr val="000000"/>
                 </a:solidFill>
-                <a:latin typeface="Helvetica Neue"/>
-                <a:ea typeface="Helvetica Neue"/>
-                <a:cs typeface="Helvetica Neue"/>
-              </a:defRPr>
-            </a:pPr>
-            <a:r>
+                <a:latin typeface="Arial"/>
+                <a:ea typeface="Arial"/>
+                <a:cs typeface="Arial"/>
+              </a:defRPr>
+            </a:pPr>
+            <a:r>
+              <a:rPr sz="3600" b="1">
+                <a:solidFill>
+                  <a:srgbClr val="000000"/>
+                </a:solidFill>
+                <a:latin typeface="Arial"/>
+                <a:ea typeface="Arial"/>
+                <a:cs typeface="Arial"/>
+              </a:rPr>
               <a:t>$3.8M / $4M</a:t>
             </a:r>
           </a:p>
@@ -6104,18 +6594,50 @@
           <a:lstStyle xmlns:a="http://schemas.openxmlformats.org/drawingml/2006/main"/>
           <a:p xmlns:a="http://schemas.openxmlformats.org/drawingml/2006/main">
             <a:pPr algn="l">
+              <a:buNone/>
               <a:defRPr sz="1650">
                 <a:solidFill>
                   <a:srgbClr val="000000"/>
                 </a:solidFill>
-                <a:latin typeface="Helvetica Neue"/>
-                <a:ea typeface="Helvetica Neue"/>
-                <a:cs typeface="Helvetica Neue"/>
-              </a:defRPr>
-            </a:pPr>
-            <a:r>
-              <a:t>Annual target / ceiling
-$0.0003856 per nominal forecast</a:t>
+                <a:latin typeface="Arial"/>
+                <a:ea typeface="Arial"/>
+                <a:cs typeface="Arial"/>
+              </a:defRPr>
+            </a:pPr>
+            <a:r>
+              <a:rPr sz="1650">
+                <a:solidFill>
+                  <a:srgbClr val="000000"/>
+                </a:solidFill>
+                <a:latin typeface="Arial"/>
+                <a:ea typeface="Arial"/>
+                <a:cs typeface="Arial"/>
+              </a:rPr>
+              <a:t>Annual target / ceiling</a:t>
+            </a:r>
+          </a:p>
+          <a:p xmlns:a="http://schemas.openxmlformats.org/drawingml/2006/main">
+            <a:pPr algn="l">
+              <a:buNone/>
+              <a:defRPr sz="1650">
+                <a:solidFill>
+                  <a:srgbClr val="000000"/>
+                </a:solidFill>
+                <a:latin typeface="Arial"/>
+                <a:ea typeface="Arial"/>
+                <a:cs typeface="Arial"/>
+              </a:defRPr>
+            </a:pPr>
+            <a:r>
+              <a:rPr sz="1650">
+                <a:solidFill>
+                  <a:srgbClr val="000000"/>
+                </a:solidFill>
+                <a:latin typeface="Arial"/>
+                <a:ea typeface="Arial"/>
+                <a:cs typeface="Arial"/>
+              </a:rPr>
+              <a:t>198.7 / 240 min • 41.3 min headroom</a:t>
             </a:r>
           </a:p>
         </p:txBody>
@@ -6183,16 +6705,25 @@
           <a:lstStyle xmlns:a="http://schemas.openxmlformats.org/drawingml/2006/main"/>
           <a:p xmlns:a="http://schemas.openxmlformats.org/drawingml/2006/main">
             <a:pPr algn="ctr">
+              <a:buNone/>
               <a:defRPr sz="1350" b="1">
                 <a:solidFill>
                   <a:srgbClr val="FFFFFF"/>
                 </a:solidFill>
-                <a:latin typeface="Helvetica Neue"/>
-                <a:ea typeface="Helvetica Neue"/>
-                <a:cs typeface="Helvetica Neue"/>
-              </a:defRPr>
-            </a:pPr>
-            <a:r>
+                <a:latin typeface="Arial"/>
+                <a:ea typeface="Arial"/>
+                <a:cs typeface="Arial"/>
+              </a:defRPr>
+            </a:pPr>
+            <a:r>
+              <a:rPr sz="1350" b="1">
+                <a:solidFill>
+                  <a:srgbClr val="FFFFFF"/>
+                </a:solidFill>
+                <a:latin typeface="Arial"/>
+                <a:ea typeface="Arial"/>
+                <a:cs typeface="Arial"/>
+              </a:rPr>
               <a:t>TARGETS, NOT BENCHMARK RESULTS</a:t>
             </a:r>
           </a:p>
@@ -6228,16 +6759,25 @@
           <a:lstStyle xmlns:a="http://schemas.openxmlformats.org/drawingml/2006/main"/>
           <a:p xmlns:a="http://schemas.openxmlformats.org/drawingml/2006/main">
             <a:pPr algn="l">
+              <a:buNone/>
               <a:defRPr sz="1200">
                 <a:solidFill>
                   <a:srgbClr val="586174"/>
                 </a:solidFill>
-                <a:latin typeface="Helvetica Neue"/>
-                <a:ea typeface="Helvetica Neue"/>
-                <a:cs typeface="Helvetica Neue"/>
-              </a:defRPr>
-            </a:pPr>
-            <a:r>
+                <a:latin typeface="Arial"/>
+                <a:ea typeface="Arial"/>
+                <a:cs typeface="Arial"/>
+              </a:defRPr>
+            </a:pPr>
+            <a:r>
+              <a:rPr sz="1200">
+                <a:solidFill>
+                  <a:srgbClr val="586174"/>
+                </a:solidFill>
+                <a:latin typeface="Arial"/>
+                <a:ea typeface="Arial"/>
+                <a:cs typeface="Arial"/>
+              </a:rPr>
               <a:t>Owner: TRẦN THANH PHỤNG (218924)</a:t>
             </a:r>
           </a:p>
@@ -6273,16 +6813,25 @@
           <a:lstStyle xmlns:a="http://schemas.openxmlformats.org/drawingml/2006/main"/>
           <a:p xmlns:a="http://schemas.openxmlformats.org/drawingml/2006/main">
             <a:pPr algn="l">
+              <a:buNone/>
               <a:defRPr sz="1350">
                 <a:solidFill>
                   <a:srgbClr val="586174"/>
                 </a:solidFill>
-                <a:latin typeface="Helvetica Neue"/>
-                <a:ea typeface="Helvetica Neue"/>
-                <a:cs typeface="Helvetica Neue"/>
-              </a:defRPr>
-            </a:pPr>
-            <a:r>
+                <a:latin typeface="Arial"/>
+                <a:ea typeface="Arial"/>
+                <a:cs typeface="Arial"/>
+              </a:defRPr>
+            </a:pPr>
+            <a:r>
+              <a:rPr sz="1350">
+                <a:solidFill>
+                  <a:srgbClr val="586174"/>
+                </a:solidFill>
+                <a:latin typeface="Arial"/>
+                <a:ea typeface="Arial"/>
+                <a:cs typeface="Arial"/>
+              </a:rPr>
               <a:t>NFR + cost check</a:t>
             </a:r>
           </a:p>
@@ -6318,16 +6867,25 @@
           <a:lstStyle xmlns:a="http://schemas.openxmlformats.org/drawingml/2006/main"/>
           <a:p xmlns:a="http://schemas.openxmlformats.org/drawingml/2006/main">
             <a:pPr algn="r">
+              <a:buNone/>
               <a:defRPr sz="1350">
                 <a:solidFill>
                   <a:srgbClr val="000000"/>
                 </a:solidFill>
-                <a:latin typeface="Helvetica Neue"/>
-                <a:ea typeface="Helvetica Neue"/>
-                <a:cs typeface="Helvetica Neue"/>
-              </a:defRPr>
-            </a:pPr>
-            <a:r>
+                <a:latin typeface="Arial"/>
+                <a:ea typeface="Arial"/>
+                <a:cs typeface="Arial"/>
+              </a:defRPr>
+            </a:pPr>
+            <a:r>
+              <a:rPr sz="1350">
+                <a:solidFill>
+                  <a:srgbClr val="000000"/>
+                </a:solidFill>
+                <a:latin typeface="Arial"/>
+                <a:ea typeface="Arial"/>
+                <a:cs typeface="Arial"/>
+              </a:rPr>
               <a:t>5</a:t>
             </a:r>
           </a:p>
@@ -6392,17 +6950,26 @@
           <a:lstStyle xmlns:a="http://schemas.openxmlformats.org/drawingml/2006/main"/>
           <a:p xmlns:a="http://schemas.openxmlformats.org/drawingml/2006/main">
             <a:pPr algn="l">
+              <a:buNone/>
               <a:defRPr sz="3600" b="1">
                 <a:solidFill>
                   <a:srgbClr val="000000"/>
                 </a:solidFill>
-                <a:latin typeface="Helvetica Neue"/>
-                <a:ea typeface="Helvetica Neue"/>
-                <a:cs typeface="Helvetica Neue"/>
-              </a:defRPr>
-            </a:pPr>
-            <a:r>
-              <a:t>Sidecar wins because isolation outweighs convenience</a:t>
+                <a:latin typeface="Arial"/>
+                <a:ea typeface="Arial"/>
+                <a:cs typeface="Arial"/>
+              </a:defRPr>
+            </a:pPr>
+            <a:r>
+              <a:rPr sz="3600" b="1">
+                <a:solidFill>
+                  <a:srgbClr val="000000"/>
+                </a:solidFill>
+                <a:latin typeface="Arial"/>
+                <a:ea typeface="Arial"/>
+                <a:cs typeface="Arial"/>
+              </a:rPr>
+              <a:t>Sidecar wins on supported isolation, not convenience.</a:t>
             </a:r>
           </a:p>
         </p:txBody>
@@ -6470,16 +7037,25 @@
           <a:lstStyle xmlns:a="http://schemas.openxmlformats.org/drawingml/2006/main"/>
           <a:p xmlns:a="http://schemas.openxmlformats.org/drawingml/2006/main">
             <a:pPr algn="ctr">
+              <a:buNone/>
               <a:defRPr sz="1350">
                 <a:solidFill>
                   <a:srgbClr val="586174"/>
                 </a:solidFill>
-                <a:latin typeface="Helvetica Neue"/>
-                <a:ea typeface="Helvetica Neue"/>
-                <a:cs typeface="Helvetica Neue"/>
-              </a:defRPr>
-            </a:pPr>
-            <a:r>
+                <a:latin typeface="Arial"/>
+                <a:ea typeface="Arial"/>
+                <a:cs typeface="Arial"/>
+              </a:defRPr>
+            </a:pPr>
+            <a:r>
+              <a:rPr sz="1350">
+                <a:solidFill>
+                  <a:srgbClr val="586174"/>
+                </a:solidFill>
+                <a:latin typeface="Arial"/>
+                <a:ea typeface="Arial"/>
+                <a:cs typeface="Arial"/>
+              </a:rPr>
               <a:t>0</a:t>
             </a:r>
           </a:p>
@@ -6548,16 +7124,25 @@
           <a:lstStyle xmlns:a="http://schemas.openxmlformats.org/drawingml/2006/main"/>
           <a:p xmlns:a="http://schemas.openxmlformats.org/drawingml/2006/main">
             <a:pPr algn="ctr">
+              <a:buNone/>
               <a:defRPr sz="1350">
                 <a:solidFill>
                   <a:srgbClr val="586174"/>
                 </a:solidFill>
-                <a:latin typeface="Helvetica Neue"/>
-                <a:ea typeface="Helvetica Neue"/>
-                <a:cs typeface="Helvetica Neue"/>
-              </a:defRPr>
-            </a:pPr>
-            <a:r>
+                <a:latin typeface="Arial"/>
+                <a:ea typeface="Arial"/>
+                <a:cs typeface="Arial"/>
+              </a:defRPr>
+            </a:pPr>
+            <a:r>
+              <a:rPr sz="1350">
+                <a:solidFill>
+                  <a:srgbClr val="586174"/>
+                </a:solidFill>
+                <a:latin typeface="Arial"/>
+                <a:ea typeface="Arial"/>
+                <a:cs typeface="Arial"/>
+              </a:rPr>
               <a:t>1</a:t>
             </a:r>
           </a:p>
@@ -6626,16 +7211,25 @@
           <a:lstStyle xmlns:a="http://schemas.openxmlformats.org/drawingml/2006/main"/>
           <a:p xmlns:a="http://schemas.openxmlformats.org/drawingml/2006/main">
             <a:pPr algn="ctr">
+              <a:buNone/>
               <a:defRPr sz="1350">
                 <a:solidFill>
                   <a:srgbClr val="586174"/>
                 </a:solidFill>
-                <a:latin typeface="Helvetica Neue"/>
-                <a:ea typeface="Helvetica Neue"/>
-                <a:cs typeface="Helvetica Neue"/>
-              </a:defRPr>
-            </a:pPr>
-            <a:r>
+                <a:latin typeface="Arial"/>
+                <a:ea typeface="Arial"/>
+                <a:cs typeface="Arial"/>
+              </a:defRPr>
+            </a:pPr>
+            <a:r>
+              <a:rPr sz="1350">
+                <a:solidFill>
+                  <a:srgbClr val="586174"/>
+                </a:solidFill>
+                <a:latin typeface="Arial"/>
+                <a:ea typeface="Arial"/>
+                <a:cs typeface="Arial"/>
+              </a:rPr>
               <a:t>2</a:t>
             </a:r>
           </a:p>
@@ -6704,16 +7298,25 @@
           <a:lstStyle xmlns:a="http://schemas.openxmlformats.org/drawingml/2006/main"/>
           <a:p xmlns:a="http://schemas.openxmlformats.org/drawingml/2006/main">
             <a:pPr algn="ctr">
+              <a:buNone/>
               <a:defRPr sz="1350">
                 <a:solidFill>
                   <a:srgbClr val="586174"/>
                 </a:solidFill>
-                <a:latin typeface="Helvetica Neue"/>
-                <a:ea typeface="Helvetica Neue"/>
-                <a:cs typeface="Helvetica Neue"/>
-              </a:defRPr>
-            </a:pPr>
-            <a:r>
+                <a:latin typeface="Arial"/>
+                <a:ea typeface="Arial"/>
+                <a:cs typeface="Arial"/>
+              </a:defRPr>
+            </a:pPr>
+            <a:r>
+              <a:rPr sz="1350">
+                <a:solidFill>
+                  <a:srgbClr val="586174"/>
+                </a:solidFill>
+                <a:latin typeface="Arial"/>
+                <a:ea typeface="Arial"/>
+                <a:cs typeface="Arial"/>
+              </a:rPr>
               <a:t>3</a:t>
             </a:r>
           </a:p>
@@ -6782,16 +7385,25 @@
           <a:lstStyle xmlns:a="http://schemas.openxmlformats.org/drawingml/2006/main"/>
           <a:p xmlns:a="http://schemas.openxmlformats.org/drawingml/2006/main">
             <a:pPr algn="ctr">
+              <a:buNone/>
               <a:defRPr sz="1350">
                 <a:solidFill>
                   <a:srgbClr val="586174"/>
                 </a:solidFill>
-                <a:latin typeface="Helvetica Neue"/>
-                <a:ea typeface="Helvetica Neue"/>
-                <a:cs typeface="Helvetica Neue"/>
-              </a:defRPr>
-            </a:pPr>
-            <a:r>
+                <a:latin typeface="Arial"/>
+                <a:ea typeface="Arial"/>
+                <a:cs typeface="Arial"/>
+              </a:defRPr>
+            </a:pPr>
+            <a:r>
+              <a:rPr sz="1350">
+                <a:solidFill>
+                  <a:srgbClr val="586174"/>
+                </a:solidFill>
+                <a:latin typeface="Arial"/>
+                <a:ea typeface="Arial"/>
+                <a:cs typeface="Arial"/>
+              </a:rPr>
               <a:t>4</a:t>
             </a:r>
           </a:p>
@@ -6860,16 +7472,25 @@
           <a:lstStyle xmlns:a="http://schemas.openxmlformats.org/drawingml/2006/main"/>
           <a:p xmlns:a="http://schemas.openxmlformats.org/drawingml/2006/main">
             <a:pPr algn="ctr">
+              <a:buNone/>
               <a:defRPr sz="1350">
                 <a:solidFill>
                   <a:srgbClr val="586174"/>
                 </a:solidFill>
-                <a:latin typeface="Helvetica Neue"/>
-                <a:ea typeface="Helvetica Neue"/>
-                <a:cs typeface="Helvetica Neue"/>
-              </a:defRPr>
-            </a:pPr>
-            <a:r>
+                <a:latin typeface="Arial"/>
+                <a:ea typeface="Arial"/>
+                <a:cs typeface="Arial"/>
+              </a:defRPr>
+            </a:pPr>
+            <a:r>
+              <a:rPr sz="1350">
+                <a:solidFill>
+                  <a:srgbClr val="586174"/>
+                </a:solidFill>
+                <a:latin typeface="Arial"/>
+                <a:ea typeface="Arial"/>
+                <a:cs typeface="Arial"/>
+              </a:rPr>
               <a:t>5</a:t>
             </a:r>
           </a:p>
@@ -6905,17 +7526,50 @@
           <a:lstStyle xmlns:a="http://schemas.openxmlformats.org/drawingml/2006/main"/>
           <a:p xmlns:a="http://schemas.openxmlformats.org/drawingml/2006/main">
             <a:pPr algn="l">
+              <a:buNone/>
               <a:defRPr sz="1650" b="1">
                 <a:solidFill>
                   <a:srgbClr val="000000"/>
                 </a:solidFill>
-                <a:latin typeface="Helvetica Neue"/>
-                <a:ea typeface="Helvetica Neue"/>
-                <a:cs typeface="Helvetica Neue"/>
-              </a:defRPr>
-            </a:pPr>
-            <a:r>
-              <a:t>External sidecar</a:t>
+                <a:latin typeface="Arial"/>
+                <a:ea typeface="Arial"/>
+                <a:cs typeface="Arial"/>
+              </a:defRPr>
+            </a:pPr>
+            <a:r>
+              <a:rPr sz="1650" b="1">
+                <a:solidFill>
+                  <a:srgbClr val="000000"/>
+                </a:solidFill>
+                <a:latin typeface="Arial"/>
+                <a:ea typeface="Arial"/>
+                <a:cs typeface="Arial"/>
+              </a:rPr>
+              <a:t>Integration</a:t>
+            </a:r>
+          </a:p>
+          <a:p xmlns:a="http://schemas.openxmlformats.org/drawingml/2006/main">
+            <a:pPr algn="l">
+              <a:buNone/>
+              <a:defRPr sz="1650" b="1">
+                <a:solidFill>
+                  <a:srgbClr val="000000"/>
+                </a:solidFill>
+                <a:latin typeface="Arial"/>
+                <a:ea typeface="Arial"/>
+                <a:cs typeface="Arial"/>
+              </a:defRPr>
+            </a:pPr>
+            <a:r>
+              <a:rPr sz="1650" b="1">
+                <a:solidFill>
+                  <a:srgbClr val="000000"/>
+                </a:solidFill>
+                <a:latin typeface="Arial"/>
+                <a:ea typeface="Arial"/>
+                <a:cs typeface="Arial"/>
+              </a:rPr>
+              <a:t>Sidecar</a:t>
             </a:r>
           </a:p>
         </p:txBody>
@@ -6985,16 +7639,25 @@
           <a:lstStyle xmlns:a="http://schemas.openxmlformats.org/drawingml/2006/main"/>
           <a:p xmlns:a="http://schemas.openxmlformats.org/drawingml/2006/main">
             <a:pPr algn="l">
+              <a:buNone/>
               <a:defRPr sz="1650" b="1">
                 <a:solidFill>
                   <a:srgbClr val="3D8DFF"/>
                 </a:solidFill>
-                <a:latin typeface="Helvetica Neue"/>
-                <a:ea typeface="Helvetica Neue"/>
-                <a:cs typeface="Helvetica Neue"/>
-              </a:defRPr>
-            </a:pPr>
-            <a:r>
+                <a:latin typeface="Arial"/>
+                <a:ea typeface="Arial"/>
+                <a:cs typeface="Arial"/>
+              </a:defRPr>
+            </a:pPr>
+            <a:r>
+              <a:rPr sz="1650" b="1">
+                <a:solidFill>
+                  <a:srgbClr val="3D8DFF"/>
+                </a:solidFill>
+                <a:latin typeface="Arial"/>
+                <a:ea typeface="Arial"/>
+                <a:cs typeface="Arial"/>
+              </a:rPr>
               <a:t>4.80</a:t>
             </a:r>
           </a:p>
@@ -7030,17 +7693,50 @@
           <a:lstStyle xmlns:a="http://schemas.openxmlformats.org/drawingml/2006/main"/>
           <a:p xmlns:a="http://schemas.openxmlformats.org/drawingml/2006/main">
             <a:pPr algn="l">
+              <a:buNone/>
               <a:defRPr sz="1650" b="0">
                 <a:solidFill>
                   <a:srgbClr val="000000"/>
                 </a:solidFill>
-                <a:latin typeface="Helvetica Neue"/>
-                <a:ea typeface="Helvetica Neue"/>
-                <a:cs typeface="Helvetica Neue"/>
-              </a:defRPr>
-            </a:pPr>
-            <a:r>
-              <a:t>Shadow state</a:t>
+                <a:latin typeface="Arial"/>
+                <a:ea typeface="Arial"/>
+                <a:cs typeface="Arial"/>
+              </a:defRPr>
+            </a:pPr>
+            <a:r>
+              <a:rPr sz="1650" b="0">
+                <a:solidFill>
+                  <a:srgbClr val="000000"/>
+                </a:solidFill>
+                <a:latin typeface="Arial"/>
+                <a:ea typeface="Arial"/>
+                <a:cs typeface="Arial"/>
+              </a:rPr>
+              <a:t>Batch platform</a:t>
+            </a:r>
+          </a:p>
+          <a:p xmlns:a="http://schemas.openxmlformats.org/drawingml/2006/main">
+            <a:pPr algn="l">
+              <a:buNone/>
+              <a:defRPr sz="1650" b="0">
+                <a:solidFill>
+                  <a:srgbClr val="000000"/>
+                </a:solidFill>
+                <a:latin typeface="Arial"/>
+                <a:ea typeface="Arial"/>
+                <a:cs typeface="Arial"/>
+              </a:defRPr>
+            </a:pPr>
+            <a:r>
+              <a:rPr sz="1650" b="0">
+                <a:solidFill>
+                  <a:srgbClr val="000000"/>
+                </a:solidFill>
+                <a:latin typeface="Arial"/>
+                <a:ea typeface="Arial"/>
+                <a:cs typeface="Arial"/>
+              </a:rPr>
+              <a:t>Managed elastic</a:t>
             </a:r>
           </a:p>
         </p:txBody>
@@ -7062,7 +7758,7 @@
         <p:spPr>
           <a:xfrm xmlns:a="http://schemas.openxmlformats.org/drawingml/2006/main">
             <a:off x="2114550" y="2533650"/>
-            <a:ext cx="2590800" cy="400050"/>
+            <a:ext cx="3011805" cy="400050"/>
           </a:xfrm>
           <a:prstGeom xmlns:a="http://schemas.openxmlformats.org/drawingml/2006/main" prst="roundRect">
             <a:avLst>
@@ -7096,7 +7792,7 @@
         </p:nvSpPr>
         <p:spPr>
           <a:xfrm xmlns:a="http://schemas.openxmlformats.org/drawingml/2006/main">
-            <a:off x="4800600" y="2600325"/>
+            <a:off x="5221605" y="2600325"/>
             <a:ext cx="609600" cy="285750"/>
           </a:xfrm>
           <a:prstGeom xmlns:a="http://schemas.openxmlformats.org/drawingml/2006/main" prst="rect">
@@ -7110,17 +7806,26 @@
           <a:lstStyle xmlns:a="http://schemas.openxmlformats.org/drawingml/2006/main"/>
           <a:p xmlns:a="http://schemas.openxmlformats.org/drawingml/2006/main">
             <a:pPr algn="l">
+              <a:buNone/>
               <a:defRPr sz="1650" b="0">
                 <a:solidFill>
                   <a:srgbClr val="586174"/>
                 </a:solidFill>
-                <a:latin typeface="Helvetica Neue"/>
-                <a:ea typeface="Helvetica Neue"/>
-                <a:cs typeface="Helvetica Neue"/>
-              </a:defRPr>
-            </a:pPr>
-            <a:r>
-              <a:t>4.00</a:t>
+                <a:latin typeface="Arial"/>
+                <a:ea typeface="Arial"/>
+                <a:cs typeface="Arial"/>
+              </a:defRPr>
+            </a:pPr>
+            <a:r>
+              <a:rPr sz="1650" b="0">
+                <a:solidFill>
+                  <a:srgbClr val="586174"/>
+                </a:solidFill>
+                <a:latin typeface="Arial"/>
+                <a:ea typeface="Arial"/>
+                <a:cs typeface="Arial"/>
+              </a:rPr>
+              <a:t>4.65</a:t>
             </a:r>
           </a:p>
         </p:txBody>
@@ -7155,17 +7860,50 @@
           <a:lstStyle xmlns:a="http://schemas.openxmlformats.org/drawingml/2006/main"/>
           <a:p xmlns:a="http://schemas.openxmlformats.org/drawingml/2006/main">
             <a:pPr algn="l">
+              <a:buNone/>
               <a:defRPr sz="1650" b="0">
                 <a:solidFill>
                   <a:srgbClr val="000000"/>
                 </a:solidFill>
-                <a:latin typeface="Helvetica Neue"/>
-                <a:ea typeface="Helvetica Neue"/>
-                <a:cs typeface="Helvetica Neue"/>
-              </a:defRPr>
-            </a:pPr>
-            <a:r>
-              <a:t>Event-driven</a:t>
+                <a:latin typeface="Arial"/>
+                <a:ea typeface="Arial"/>
+                <a:cs typeface="Arial"/>
+              </a:defRPr>
+            </a:pPr>
+            <a:r>
+              <a:rPr sz="1650" b="0">
+                <a:solidFill>
+                  <a:srgbClr val="000000"/>
+                </a:solidFill>
+                <a:latin typeface="Arial"/>
+                <a:ea typeface="Arial"/>
+                <a:cs typeface="Arial"/>
+              </a:rPr>
+              <a:t>Model family</a:t>
+            </a:r>
+          </a:p>
+          <a:p xmlns:a="http://schemas.openxmlformats.org/drawingml/2006/main">
+            <a:pPr algn="l">
+              <a:buNone/>
+              <a:defRPr sz="1650" b="0">
+                <a:solidFill>
+                  <a:srgbClr val="000000"/>
+                </a:solidFill>
+                <a:latin typeface="Arial"/>
+                <a:ea typeface="Arial"/>
+                <a:cs typeface="Arial"/>
+              </a:defRPr>
+            </a:pPr>
+            <a:r>
+              <a:rPr sz="1650" b="0">
+                <a:solidFill>
+                  <a:srgbClr val="000000"/>
+                </a:solidFill>
+                <a:latin typeface="Arial"/>
+                <a:ea typeface="Arial"/>
+                <a:cs typeface="Arial"/>
+              </a:rPr>
+              <a:t>Hybrid hierarchy</a:t>
             </a:r>
           </a:p>
         </p:txBody>
@@ -7187,7 +7925,7 @@
         <p:spPr>
           <a:xfrm xmlns:a="http://schemas.openxmlformats.org/drawingml/2006/main">
             <a:off x="2114550" y="3257550"/>
-            <a:ext cx="1716405" cy="400050"/>
+            <a:ext cx="2947035" cy="400050"/>
           </a:xfrm>
           <a:prstGeom xmlns:a="http://schemas.openxmlformats.org/drawingml/2006/main" prst="roundRect">
             <a:avLst>
@@ -7221,7 +7959,7 @@
         </p:nvSpPr>
         <p:spPr>
           <a:xfrm xmlns:a="http://schemas.openxmlformats.org/drawingml/2006/main">
-            <a:off x="3926205" y="3324225"/>
+            <a:off x="5156835" y="3324225"/>
             <a:ext cx="609600" cy="285750"/>
           </a:xfrm>
           <a:prstGeom xmlns:a="http://schemas.openxmlformats.org/drawingml/2006/main" prst="rect">
@@ -7235,17 +7973,26 @@
           <a:lstStyle xmlns:a="http://schemas.openxmlformats.org/drawingml/2006/main"/>
           <a:p xmlns:a="http://schemas.openxmlformats.org/drawingml/2006/main">
             <a:pPr algn="l">
+              <a:buNone/>
               <a:defRPr sz="1650" b="0">
                 <a:solidFill>
                   <a:srgbClr val="586174"/>
                 </a:solidFill>
-                <a:latin typeface="Helvetica Neue"/>
-                <a:ea typeface="Helvetica Neue"/>
-                <a:cs typeface="Helvetica Neue"/>
-              </a:defRPr>
-            </a:pPr>
-            <a:r>
-              <a:t>2.65</a:t>
+                <a:latin typeface="Arial"/>
+                <a:ea typeface="Arial"/>
+                <a:cs typeface="Arial"/>
+              </a:defRPr>
+            </a:pPr>
+            <a:r>
+              <a:rPr sz="1650" b="0">
+                <a:solidFill>
+                  <a:srgbClr val="586174"/>
+                </a:solidFill>
+                <a:latin typeface="Arial"/>
+                <a:ea typeface="Arial"/>
+                <a:cs typeface="Arial"/>
+              </a:rPr>
+              <a:t>4.55</a:t>
             </a:r>
           </a:p>
         </p:txBody>
@@ -7280,17 +8027,50 @@
           <a:lstStyle xmlns:a="http://schemas.openxmlformats.org/drawingml/2006/main"/>
           <a:p xmlns:a="http://schemas.openxmlformats.org/drawingml/2006/main">
             <a:pPr algn="l">
+              <a:buNone/>
               <a:defRPr sz="1650" b="0">
                 <a:solidFill>
                   <a:srgbClr val="000000"/>
                 </a:solidFill>
-                <a:latin typeface="Helvetica Neue"/>
-                <a:ea typeface="Helvetica Neue"/>
-                <a:cs typeface="Helvetica Neue"/>
-              </a:defRPr>
-            </a:pPr>
-            <a:r>
-              <a:t>API gateway</a:t>
+                <a:latin typeface="Arial"/>
+                <a:ea typeface="Arial"/>
+                <a:cs typeface="Arial"/>
+              </a:defRPr>
+            </a:pPr>
+            <a:r>
+              <a:rPr sz="1650" b="0">
+                <a:solidFill>
+                  <a:srgbClr val="000000"/>
+                </a:solidFill>
+                <a:latin typeface="Arial"/>
+                <a:ea typeface="Arial"/>
+                <a:cs typeface="Arial"/>
+              </a:rPr>
+              <a:t>Sensitivity</a:t>
+            </a:r>
+          </a:p>
+          <a:p xmlns:a="http://schemas.openxmlformats.org/drawingml/2006/main">
+            <a:pPr algn="l">
+              <a:buNone/>
+              <a:defRPr sz="1650" b="0">
+                <a:solidFill>
+                  <a:srgbClr val="000000"/>
+                </a:solidFill>
+                <a:latin typeface="Arial"/>
+                <a:ea typeface="Arial"/>
+                <a:cs typeface="Arial"/>
+              </a:defRPr>
+            </a:pPr>
+            <a:r>
+              <a:rPr sz="1650" b="0">
+                <a:solidFill>
+                  <a:srgbClr val="000000"/>
+                </a:solidFill>
+                <a:latin typeface="Arial"/>
+                <a:ea typeface="Arial"/>
+                <a:cs typeface="Arial"/>
+              </a:rPr>
+              <a:t>Hybrid = global</a:t>
             </a:r>
           </a:p>
         </p:txBody>
@@ -7312,7 +8092,7 @@
         <p:spPr>
           <a:xfrm xmlns:a="http://schemas.openxmlformats.org/drawingml/2006/main">
             <a:off x="2114550" y="3981450"/>
-            <a:ext cx="1392555" cy="400050"/>
+            <a:ext cx="2882265" cy="400050"/>
           </a:xfrm>
           <a:prstGeom xmlns:a="http://schemas.openxmlformats.org/drawingml/2006/main" prst="roundRect">
             <a:avLst>
@@ -7346,7 +8126,7 @@
         </p:nvSpPr>
         <p:spPr>
           <a:xfrm xmlns:a="http://schemas.openxmlformats.org/drawingml/2006/main">
-            <a:off x="3602355" y="4048125"/>
+            <a:off x="5092065" y="4048125"/>
             <a:ext cx="609600" cy="285750"/>
           </a:xfrm>
           <a:prstGeom xmlns:a="http://schemas.openxmlformats.org/drawingml/2006/main" prst="rect">
@@ -7360,142 +8140,26 @@
           <a:lstStyle xmlns:a="http://schemas.openxmlformats.org/drawingml/2006/main"/>
           <a:p xmlns:a="http://schemas.openxmlformats.org/drawingml/2006/main">
             <a:pPr algn="l">
+              <a:buNone/>
               <a:defRPr sz="1650" b="0">
                 <a:solidFill>
                   <a:srgbClr val="586174"/>
                 </a:solidFill>
-                <a:latin typeface="Helvetica Neue"/>
-                <a:ea typeface="Helvetica Neue"/>
-                <a:cs typeface="Helvetica Neue"/>
-              </a:defRPr>
-            </a:pPr>
-            <a:r>
-              <a:t>2.15</a:t>
-            </a:r>
-          </a:p>
-        </p:txBody>
-      </p:sp>
-      <p:sp>
-        <p:nvSpPr>
-          <p:cNvPr id="26" name="slide-6-bar-label-5">
-            <a:extLst xmlns:a="http://schemas.openxmlformats.org/drawingml/2006/main">
-              <a:ext uri="{FF2B5EF4-FFF2-40B4-BE49-F238E27FC236}">
-                <a16:creationId xmlns:a16="http://schemas.microsoft.com/office/drawing/2014/main" id="{8D5198D1-D36D-43DB-B9B1-A407DA7F37AE}"/>
-              </a:ext>
-            </a:extLst>
-          </p:cNvPr>
-          <p:cNvSpPr>
-            <a:spLocks xmlns:a="http://schemas.openxmlformats.org/drawingml/2006/main" noGrp="1"/>
-          </p:cNvSpPr>
-          <p:nvPr/>
-        </p:nvSpPr>
-        <p:spPr>
-          <a:xfrm xmlns:a="http://schemas.openxmlformats.org/drawingml/2006/main">
-            <a:off x="400050" y="4752975"/>
-            <a:ext cx="1600200" cy="342900"/>
-          </a:xfrm>
-          <a:prstGeom xmlns:a="http://schemas.openxmlformats.org/drawingml/2006/main" prst="rect">
-            <a:avLst/>
-          </a:prstGeom>
-        </p:spPr>
-        <p:txBody>
-          <a:bodyPr xmlns:a="http://schemas.openxmlformats.org/drawingml/2006/main" wrap="square" lIns="0" tIns="0" rIns="0" bIns="0" anchor="t">
-            <a:noAutofit/>
-          </a:bodyPr>
-          <a:lstStyle xmlns:a="http://schemas.openxmlformats.org/drawingml/2006/main"/>
-          <a:p xmlns:a="http://schemas.openxmlformats.org/drawingml/2006/main">
-            <a:pPr algn="l">
-              <a:defRPr sz="1650" b="0">
-                <a:solidFill>
-                  <a:srgbClr val="000000"/>
-                </a:solidFill>
-                <a:latin typeface="Helvetica Neue"/>
-                <a:ea typeface="Helvetica Neue"/>
-                <a:cs typeface="Helvetica Neue"/>
-              </a:defRPr>
-            </a:pPr>
-            <a:r>
-              <a:t>In-process plugin</a:t>
-            </a:r>
-          </a:p>
-        </p:txBody>
-      </p:sp>
-      <p:sp>
-        <p:nvSpPr>
-          <p:cNvPr id="27" name="slide-6-bar-5">
-            <a:extLst xmlns:a="http://schemas.openxmlformats.org/drawingml/2006/main">
-              <a:ext uri="{FF2B5EF4-FFF2-40B4-BE49-F238E27FC236}">
-                <a16:creationId xmlns:a16="http://schemas.microsoft.com/office/drawing/2014/main" id="{510F2A61-5509-46C4-BAE4-092C9C8802A1}"/>
-              </a:ext>
-            </a:extLst>
-          </p:cNvPr>
-          <p:cNvSpPr>
-            <a:spLocks xmlns:a="http://schemas.openxmlformats.org/drawingml/2006/main" noGrp="1"/>
-          </p:cNvSpPr>
-          <p:nvPr/>
-        </p:nvSpPr>
-        <p:spPr>
-          <a:xfrm xmlns:a="http://schemas.openxmlformats.org/drawingml/2006/main">
-            <a:off x="2114550" y="4705350"/>
-            <a:ext cx="1068705" cy="400050"/>
-          </a:xfrm>
-          <a:prstGeom xmlns:a="http://schemas.openxmlformats.org/drawingml/2006/main" prst="roundRect">
-            <a:avLst>
-              <a:gd name="adj" fmla="val 9524"/>
-            </a:avLst>
-          </a:prstGeom>
-          <a:solidFill xmlns:a="http://schemas.openxmlformats.org/drawingml/2006/main">
-            <a:srgbClr val="B8BCC4"/>
-          </a:solidFill>
-          <a:ln xmlns:a="http://schemas.openxmlformats.org/drawingml/2006/main" w="0">
-            <a:solidFill>
-              <a:srgbClr val="B8BCC4"/>
-            </a:solidFill>
-            <a:prstDash val="solid"/>
-          </a:ln>
-        </p:spPr>
-      </p:sp>
-      <p:sp>
-        <p:nvSpPr>
-          <p:cNvPr id="28" name="slide-6-bar-value-5">
-            <a:extLst xmlns:a="http://schemas.openxmlformats.org/drawingml/2006/main">
-              <a:ext uri="{FF2B5EF4-FFF2-40B4-BE49-F238E27FC236}">
-                <a16:creationId xmlns:a16="http://schemas.microsoft.com/office/drawing/2014/main" id="{471A7F6F-7CFC-4B7D-AC1E-8B4849582739}"/>
-              </a:ext>
-            </a:extLst>
-          </p:cNvPr>
-          <p:cNvSpPr>
-            <a:spLocks xmlns:a="http://schemas.openxmlformats.org/drawingml/2006/main" noGrp="1"/>
-          </p:cNvSpPr>
-          <p:nvPr/>
-        </p:nvSpPr>
-        <p:spPr>
-          <a:xfrm xmlns:a="http://schemas.openxmlformats.org/drawingml/2006/main">
-            <a:off x="3278505" y="4772025"/>
-            <a:ext cx="609600" cy="285750"/>
-          </a:xfrm>
-          <a:prstGeom xmlns:a="http://schemas.openxmlformats.org/drawingml/2006/main" prst="rect">
-            <a:avLst/>
-          </a:prstGeom>
-        </p:spPr>
-        <p:txBody>
-          <a:bodyPr xmlns:a="http://schemas.openxmlformats.org/drawingml/2006/main" wrap="square" lIns="0" tIns="0" rIns="0" bIns="0" anchor="t">
-            <a:noAutofit/>
-          </a:bodyPr>
-          <a:lstStyle xmlns:a="http://schemas.openxmlformats.org/drawingml/2006/main"/>
-          <a:p xmlns:a="http://schemas.openxmlformats.org/drawingml/2006/main">
-            <a:pPr algn="l">
-              <a:defRPr sz="1650" b="0">
+                <a:latin typeface="Arial"/>
+                <a:ea typeface="Arial"/>
+                <a:cs typeface="Arial"/>
+              </a:defRPr>
+            </a:pPr>
+            <a:r>
+              <a:rPr sz="1650" b="0">
                 <a:solidFill>
                   <a:srgbClr val="586174"/>
                 </a:solidFill>
-                <a:latin typeface="Helvetica Neue"/>
-                <a:ea typeface="Helvetica Neue"/>
-                <a:cs typeface="Helvetica Neue"/>
-              </a:defRPr>
-            </a:pPr>
-            <a:r>
-              <a:t>1.65</a:t>
+                <a:latin typeface="Arial"/>
+                <a:ea typeface="Arial"/>
+                <a:cs typeface="Arial"/>
+              </a:rPr>
+              <a:t>4.45</a:t>
             </a:r>
           </a:p>
         </p:txBody>
@@ -7565,17 +8229,26 @@
           <a:lstStyle xmlns:a="http://schemas.openxmlformats.org/drawingml/2006/main"/>
           <a:p xmlns:a="http://schemas.openxmlformats.org/drawingml/2006/main">
             <a:pPr algn="l">
+              <a:buNone/>
               <a:defRPr sz="2400" b="1">
                 <a:solidFill>
                   <a:srgbClr val="000000"/>
                 </a:solidFill>
-                <a:latin typeface="Helvetica Neue"/>
-                <a:ea typeface="Helvetica Neue"/>
-                <a:cs typeface="Helvetica Neue"/>
-              </a:defRPr>
-            </a:pPr>
-            <a:r>
-              <a:t>Decision</a:t>
+                <a:latin typeface="Arial"/>
+                <a:ea typeface="Arial"/>
+                <a:cs typeface="Arial"/>
+              </a:defRPr>
+            </a:pPr>
+            <a:r>
+              <a:rPr sz="2400" b="1">
+                <a:solidFill>
+                  <a:srgbClr val="000000"/>
+                </a:solidFill>
+                <a:latin typeface="Arial"/>
+                <a:ea typeface="Arial"/>
+                <a:cs typeface="Arial"/>
+              </a:rPr>
+              <a:t>ADR</a:t>
             </a:r>
           </a:p>
         </p:txBody>
@@ -7610,17 +8283,26 @@
           <a:lstStyle xmlns:a="http://schemas.openxmlformats.org/drawingml/2006/main"/>
           <a:p xmlns:a="http://schemas.openxmlformats.org/drawingml/2006/main">
             <a:pPr algn="l">
+              <a:buNone/>
               <a:defRPr sz="1650">
                 <a:solidFill>
                   <a:srgbClr val="000000"/>
                 </a:solidFill>
-                <a:latin typeface="Helvetica Neue"/>
-                <a:ea typeface="Helvetica Neue"/>
-                <a:cs typeface="Helvetica Neue"/>
-              </a:defRPr>
-            </a:pPr>
-            <a:r>
-              <a:t>Use only nightly batch, override table, and post-generation review queue.</a:t>
+                <a:latin typeface="Arial"/>
+                <a:ea typeface="Arial"/>
+                <a:cs typeface="Arial"/>
+              </a:defRPr>
+            </a:pPr>
+            <a:r>
+              <a:rPr sz="1650">
+                <a:solidFill>
+                  <a:srgbClr val="000000"/>
+                </a:solidFill>
+                <a:latin typeface="Arial"/>
+                <a:ea typeface="Arial"/>
+                <a:cs typeface="Arial"/>
+              </a:rPr>
+              <a:t>Fail-open sidecar via supported extensions; MERLIN stays authoritative.</a:t>
             </a:r>
           </a:p>
         </p:txBody>
@@ -7690,16 +8372,25 @@
           <a:lstStyle xmlns:a="http://schemas.openxmlformats.org/drawingml/2006/main"/>
           <a:p xmlns:a="http://schemas.openxmlformats.org/drawingml/2006/main">
             <a:pPr algn="l">
+              <a:buNone/>
               <a:defRPr sz="2400" b="1">
                 <a:solidFill>
                   <a:srgbClr val="000000"/>
                 </a:solidFill>
-                <a:latin typeface="Helvetica Neue"/>
-                <a:ea typeface="Helvetica Neue"/>
-                <a:cs typeface="Helvetica Neue"/>
-              </a:defRPr>
-            </a:pPr>
-            <a:r>
+                <a:latin typeface="Arial"/>
+                <a:ea typeface="Arial"/>
+                <a:cs typeface="Arial"/>
+              </a:defRPr>
+            </a:pPr>
+            <a:r>
+              <a:rPr sz="2400" b="1">
+                <a:solidFill>
+                  <a:srgbClr val="000000"/>
+                </a:solidFill>
+                <a:latin typeface="Arial"/>
+                <a:ea typeface="Arial"/>
+                <a:cs typeface="Arial"/>
+              </a:rPr>
               <a:t>Accepted trade-off</a:t>
             </a:r>
           </a:p>
@@ -7735,17 +8426,26 @@
           <a:lstStyle xmlns:a="http://schemas.openxmlformats.org/drawingml/2006/main"/>
           <a:p xmlns:a="http://schemas.openxmlformats.org/drawingml/2006/main">
             <a:pPr algn="l">
+              <a:buNone/>
               <a:defRPr sz="1650">
                 <a:solidFill>
                   <a:srgbClr val="000000"/>
                 </a:solidFill>
-                <a:latin typeface="Helvetica Neue"/>
-                <a:ea typeface="Helvetica Neue"/>
-                <a:cs typeface="Helvetica Neue"/>
-              </a:defRPr>
-            </a:pPr>
-            <a:r>
-              <a:t>Duplicate snapshots, reconcile divergence, and operate two systems.</a:t>
+                <a:latin typeface="Arial"/>
+                <a:ea typeface="Arial"/>
+                <a:cs typeface="Arial"/>
+              </a:defRPr>
+            </a:pPr>
+            <a:r>
+              <a:rPr sz="1650">
+                <a:solidFill>
+                  <a:srgbClr val="000000"/>
+                </a:solidFill>
+                <a:latin typeface="Arial"/>
+                <a:ea typeface="Arial"/>
+                <a:cs typeface="Arial"/>
+              </a:rPr>
+              <a:t>Duplicate snapshots, reconciliation, certified adapter work, and two-system operations.</a:t>
             </a:r>
           </a:p>
         </p:txBody>
@@ -7815,17 +8515,26 @@
           <a:lstStyle xmlns:a="http://schemas.openxmlformats.org/drawingml/2006/main"/>
           <a:p xmlns:a="http://schemas.openxmlformats.org/drawingml/2006/main">
             <a:pPr algn="l">
+              <a:buNone/>
               <a:defRPr sz="2400" b="1">
                 <a:solidFill>
                   <a:srgbClr val="000000"/>
                 </a:solidFill>
-                <a:latin typeface="Helvetica Neue"/>
-                <a:ea typeface="Helvetica Neue"/>
-                <a:cs typeface="Helvetica Neue"/>
-              </a:defRPr>
-            </a:pPr>
-            <a:r>
-              <a:t>Evidence boundary</a:t>
+                <a:latin typeface="Arial"/>
+                <a:ea typeface="Arial"/>
+                <a:cs typeface="Arial"/>
+              </a:defRPr>
+            </a:pPr>
+            <a:r>
+              <a:rPr sz="2400" b="1">
+                <a:solidFill>
+                  <a:srgbClr val="000000"/>
+                </a:solidFill>
+                <a:latin typeface="Arial"/>
+                <a:ea typeface="Arial"/>
+                <a:cs typeface="Arial"/>
+              </a:rPr>
+              <a:t>Sensitivity boundary</a:t>
             </a:r>
           </a:p>
         </p:txBody>
@@ -7860,17 +8569,26 @@
           <a:lstStyle xmlns:a="http://schemas.openxmlformats.org/drawingml/2006/main"/>
           <a:p xmlns:a="http://schemas.openxmlformats.org/drawingml/2006/main">
             <a:pPr algn="l">
+              <a:buNone/>
               <a:defRPr sz="1650">
                 <a:solidFill>
                   <a:srgbClr val="000000"/>
                 </a:solidFill>
-                <a:latin typeface="Helvetica Neue"/>
-                <a:ea typeface="Helvetica Neue"/>
-                <a:cs typeface="Helvetica Neue"/>
-              </a:defRPr>
-            </a:pPr>
-            <a:r>
-              <a:t>Scores choose direction; measured release gates decide influence.</a:t>
+                <a:latin typeface="Arial"/>
+                <a:ea typeface="Arial"/>
+                <a:cs typeface="Arial"/>
+              </a:defRPr>
+            </a:pPr>
+            <a:r>
+              <a:rPr sz="1650">
+                <a:solidFill>
+                  <a:srgbClr val="000000"/>
+                </a:solidFill>
+                <a:latin typeface="Arial"/>
+                <a:ea typeface="Arial"/>
+                <a:cs typeface="Arial"/>
+              </a:rPr>
+              <a:t>A cost-weight shift ties hybrid and global at 4.45; replay decides the final model.</a:t>
             </a:r>
           </a:p>
         </p:txBody>
@@ -7905,16 +8623,25 @@
           <a:lstStyle xmlns:a="http://schemas.openxmlformats.org/drawingml/2006/main"/>
           <a:p xmlns:a="http://schemas.openxmlformats.org/drawingml/2006/main">
             <a:pPr algn="l">
+              <a:buNone/>
               <a:defRPr sz="975">
                 <a:solidFill>
                   <a:srgbClr val="586174"/>
                 </a:solidFill>
-                <a:latin typeface="Helvetica Neue"/>
-                <a:ea typeface="Helvetica Neue"/>
-                <a:cs typeface="Helvetica Neue"/>
-              </a:defRPr>
-            </a:pPr>
-            <a:r>
+                <a:latin typeface="Arial"/>
+                <a:ea typeface="Arial"/>
+                <a:cs typeface="Arial"/>
+              </a:defRPr>
+            </a:pPr>
+            <a:r>
+              <a:rPr sz="975">
+                <a:solidFill>
+                  <a:srgbClr val="586174"/>
+                </a:solidFill>
+                <a:latin typeface="Arial"/>
+                <a:ea typeface="Arial"/>
+                <a:cs typeface="Arial"/>
+              </a:rPr>
               <a:t>Owners: NGUYỄN HÒA (122989); PHẠM THỊ THANH HUYỀN (164955)</a:t>
             </a:r>
           </a:p>
@@ -7950,16 +8677,25 @@
           <a:lstStyle xmlns:a="http://schemas.openxmlformats.org/drawingml/2006/main"/>
           <a:p xmlns:a="http://schemas.openxmlformats.org/drawingml/2006/main">
             <a:pPr algn="l">
+              <a:buNone/>
               <a:defRPr sz="1350">
                 <a:solidFill>
                   <a:srgbClr val="586174"/>
                 </a:solidFill>
-                <a:latin typeface="Helvetica Neue"/>
-                <a:ea typeface="Helvetica Neue"/>
-                <a:cs typeface="Helvetica Neue"/>
-              </a:defRPr>
-            </a:pPr>
-            <a:r>
+                <a:latin typeface="Arial"/>
+                <a:ea typeface="Arial"/>
+                <a:cs typeface="Arial"/>
+              </a:defRPr>
+            </a:pPr>
+            <a:r>
+              <a:rPr sz="1350">
+                <a:solidFill>
+                  <a:srgbClr val="586174"/>
+                </a:solidFill>
+                <a:latin typeface="Arial"/>
+                <a:ea typeface="Arial"/>
+                <a:cs typeface="Arial"/>
+              </a:rPr>
               <a:t>Technology selection + ADR</a:t>
             </a:r>
           </a:p>
@@ -7995,16 +8731,25 @@
           <a:lstStyle xmlns:a="http://schemas.openxmlformats.org/drawingml/2006/main"/>
           <a:p xmlns:a="http://schemas.openxmlformats.org/drawingml/2006/main">
             <a:pPr algn="r">
+              <a:buNone/>
               <a:defRPr sz="1350">
                 <a:solidFill>
                   <a:srgbClr val="000000"/>
                 </a:solidFill>
-                <a:latin typeface="Helvetica Neue"/>
-                <a:ea typeface="Helvetica Neue"/>
-                <a:cs typeface="Helvetica Neue"/>
-              </a:defRPr>
-            </a:pPr>
-            <a:r>
+                <a:latin typeface="Arial"/>
+                <a:ea typeface="Arial"/>
+                <a:cs typeface="Arial"/>
+              </a:defRPr>
+            </a:pPr>
+            <a:r>
+              <a:rPr sz="1350">
+                <a:solidFill>
+                  <a:srgbClr val="000000"/>
+                </a:solidFill>
+                <a:latin typeface="Arial"/>
+                <a:ea typeface="Arial"/>
+                <a:cs typeface="Arial"/>
+              </a:rPr>
               <a:t>6</a:t>
             </a:r>
           </a:p>
@@ -8069,16 +8814,25 @@
           <a:lstStyle xmlns:a="http://schemas.openxmlformats.org/drawingml/2006/main"/>
           <a:p xmlns:a="http://schemas.openxmlformats.org/drawingml/2006/main">
             <a:pPr algn="l">
+              <a:buNone/>
               <a:defRPr sz="3600" b="1">
                 <a:solidFill>
                   <a:srgbClr val="000000"/>
                 </a:solidFill>
-                <a:latin typeface="Helvetica Neue"/>
-                <a:ea typeface="Helvetica Neue"/>
-                <a:cs typeface="Helvetica Neue"/>
-              </a:defRPr>
-            </a:pPr>
-            <a:r>
+                <a:latin typeface="Arial"/>
+                <a:ea typeface="Arial"/>
+                <a:cs typeface="Arial"/>
+              </a:defRPr>
+            </a:pPr>
+            <a:r>
+              <a:rPr sz="3600" b="1">
+                <a:solidFill>
+                  <a:srgbClr val="000000"/>
+                </a:solidFill>
+                <a:latin typeface="Arial"/>
+                <a:ea typeface="Arial"/>
+                <a:cs typeface="Arial"/>
+              </a:rPr>
               <a:t>Every top risk has a threshold and a safe fallback</a:t>
             </a:r>
           </a:p>
@@ -8114,16 +8868,25 @@
           <a:lstStyle xmlns:a="http://schemas.openxmlformats.org/drawingml/2006/main"/>
           <a:p xmlns:a="http://schemas.openxmlformats.org/drawingml/2006/main">
             <a:pPr algn="l">
+              <a:buNone/>
               <a:defRPr sz="1650">
                 <a:solidFill>
                   <a:srgbClr val="586174"/>
                 </a:solidFill>
-                <a:latin typeface="Helvetica Neue"/>
-                <a:ea typeface="Helvetica Neue"/>
-                <a:cs typeface="Helvetica Neue"/>
-              </a:defRPr>
-            </a:pPr>
-            <a:r>
+                <a:latin typeface="Arial"/>
+                <a:ea typeface="Arial"/>
+                <a:cs typeface="Arial"/>
+              </a:defRPr>
+            </a:pPr>
+            <a:r>
+              <a:rPr sz="1650">
+                <a:solidFill>
+                  <a:srgbClr val="586174"/>
+                </a:solidFill>
+                <a:latin typeface="Arial"/>
+                <a:ea typeface="Arial"/>
+                <a:cs typeface="Arial"/>
+              </a:rPr>
               <a:t>All five exceed tolerance for unbounded influence; every stop condition leaves MERLIN and POS independent.</a:t>
             </a:r>
           </a:p>
@@ -8131,7 +8894,7 @@
       </p:sp>
       <p:graphicFrame>
         <p:nvGraphicFramePr>
-          <p:cNvPr id="9" name="slide-7-risk-table"/>
+          <p:cNvPr id="11" name="slide-7-risk-table"/>
           <p:cNvGraphicFramePr/>
           <p:nvPr/>
         </p:nvGraphicFramePr>
@@ -8483,16 +9246,25 @@
           <a:lstStyle xmlns:a="http://schemas.openxmlformats.org/drawingml/2006/main"/>
           <a:p xmlns:a="http://schemas.openxmlformats.org/drawingml/2006/main">
             <a:pPr algn="l">
+              <a:buNone/>
               <a:defRPr sz="1200">
                 <a:solidFill>
                   <a:srgbClr val="586174"/>
                 </a:solidFill>
-                <a:latin typeface="Helvetica Neue"/>
-                <a:ea typeface="Helvetica Neue"/>
-                <a:cs typeface="Helvetica Neue"/>
-              </a:defRPr>
-            </a:pPr>
-            <a:r>
+                <a:latin typeface="Arial"/>
+                <a:ea typeface="Arial"/>
+                <a:cs typeface="Arial"/>
+              </a:defRPr>
+            </a:pPr>
+            <a:r>
+              <a:rPr sz="1200">
+                <a:solidFill>
+                  <a:srgbClr val="586174"/>
+                </a:solidFill>
+                <a:latin typeface="Arial"/>
+                <a:ea typeface="Arial"/>
+                <a:cs typeface="Arial"/>
+              </a:rPr>
               <a:t>Owner: TRẦM QUỐC THUẬN (112287)</a:t>
             </a:r>
           </a:p>
@@ -8528,16 +9300,25 @@
           <a:lstStyle xmlns:a="http://schemas.openxmlformats.org/drawingml/2006/main"/>
           <a:p xmlns:a="http://schemas.openxmlformats.org/drawingml/2006/main">
             <a:pPr algn="l">
+              <a:buNone/>
               <a:defRPr sz="1350">
                 <a:solidFill>
                   <a:srgbClr val="586174"/>
                 </a:solidFill>
-                <a:latin typeface="Helvetica Neue"/>
-                <a:ea typeface="Helvetica Neue"/>
-                <a:cs typeface="Helvetica Neue"/>
-              </a:defRPr>
-            </a:pPr>
-            <a:r>
+                <a:latin typeface="Arial"/>
+                <a:ea typeface="Arial"/>
+                <a:cs typeface="Arial"/>
+              </a:defRPr>
+            </a:pPr>
+            <a:r>
+              <a:rPr sz="1350">
+                <a:solidFill>
+                  <a:srgbClr val="586174"/>
+                </a:solidFill>
+                <a:latin typeface="Arial"/>
+                <a:ea typeface="Arial"/>
+                <a:cs typeface="Arial"/>
+              </a:rPr>
               <a:t>Top five architecture risks</a:t>
             </a:r>
           </a:p>
@@ -8573,16 +9354,25 @@
           <a:lstStyle xmlns:a="http://schemas.openxmlformats.org/drawingml/2006/main"/>
           <a:p xmlns:a="http://schemas.openxmlformats.org/drawingml/2006/main">
             <a:pPr algn="r">
+              <a:buNone/>
               <a:defRPr sz="1350">
                 <a:solidFill>
                   <a:srgbClr val="000000"/>
                 </a:solidFill>
-                <a:latin typeface="Helvetica Neue"/>
-                <a:ea typeface="Helvetica Neue"/>
-                <a:cs typeface="Helvetica Neue"/>
-              </a:defRPr>
-            </a:pPr>
-            <a:r>
+                <a:latin typeface="Arial"/>
+                <a:ea typeface="Arial"/>
+                <a:cs typeface="Arial"/>
+              </a:defRPr>
+            </a:pPr>
+            <a:r>
+              <a:rPr sz="1350">
+                <a:solidFill>
+                  <a:srgbClr val="000000"/>
+                </a:solidFill>
+                <a:latin typeface="Arial"/>
+                <a:ea typeface="Arial"/>
+                <a:cs typeface="Arial"/>
+              </a:rPr>
               <a:t>7</a:t>
             </a:r>
           </a:p>
@@ -8647,16 +9437,25 @@
           <a:lstStyle xmlns:a="http://schemas.openxmlformats.org/drawingml/2006/main"/>
           <a:p xmlns:a="http://schemas.openxmlformats.org/drawingml/2006/main">
             <a:pPr algn="l">
+              <a:buNone/>
               <a:defRPr sz="3600" b="1">
                 <a:solidFill>
                   <a:srgbClr val="000000"/>
                 </a:solidFill>
-                <a:latin typeface="Helvetica Neue"/>
-                <a:ea typeface="Helvetica Neue"/>
-                <a:cs typeface="Helvetica Neue"/>
-              </a:defRPr>
-            </a:pPr>
-            <a:r>
+                <a:latin typeface="Arial"/>
+                <a:ea typeface="Arial"/>
+                <a:cs typeface="Arial"/>
+              </a:defRPr>
+            </a:pPr>
+            <a:r>
+              <a:rPr sz="3600" b="1">
+                <a:solidFill>
+                  <a:srgbClr val="000000"/>
+                </a:solidFill>
+                <a:latin typeface="Arial"/>
+                <a:ea typeface="Arial"/>
+                <a:cs typeface="Arial"/>
+              </a:rPr>
               <a:t> Earn influence; disable it in minutes</a:t>
             </a:r>
           </a:p>
@@ -8727,16 +9526,25 @@
           <a:lstStyle xmlns:a="http://schemas.openxmlformats.org/drawingml/2006/main"/>
           <a:p xmlns:a="http://schemas.openxmlformats.org/drawingml/2006/main">
             <a:pPr algn="l">
+              <a:buNone/>
               <a:defRPr sz="2400" b="1">
                 <a:solidFill>
                   <a:srgbClr val="000000"/>
                 </a:solidFill>
-                <a:latin typeface="Helvetica Neue"/>
-                <a:ea typeface="Helvetica Neue"/>
-                <a:cs typeface="Helvetica Neue"/>
-              </a:defRPr>
-            </a:pPr>
-            <a:r>
+                <a:latin typeface="Arial"/>
+                <a:ea typeface="Arial"/>
+                <a:cs typeface="Arial"/>
+              </a:defRPr>
+            </a:pPr>
+            <a:r>
+              <a:rPr sz="2400" b="1">
+                <a:solidFill>
+                  <a:srgbClr val="000000"/>
+                </a:solidFill>
+                <a:latin typeface="Arial"/>
+                <a:ea typeface="Arial"/>
+                <a:cs typeface="Arial"/>
+              </a:rPr>
               <a:t>Discovery + replay</a:t>
             </a:r>
           </a:p>
@@ -8772,16 +9580,25 @@
           <a:lstStyle xmlns:a="http://schemas.openxmlformats.org/drawingml/2006/main"/>
           <a:p xmlns:a="http://schemas.openxmlformats.org/drawingml/2006/main">
             <a:pPr algn="l">
+              <a:buNone/>
               <a:defRPr sz="1650">
                 <a:solidFill>
                   <a:srgbClr val="000000"/>
                 </a:solidFill>
-                <a:latin typeface="Helvetica Neue"/>
-                <a:ea typeface="Helvetica Neue"/>
-                <a:cs typeface="Helvetica Neue"/>
-              </a:defRPr>
-            </a:pPr>
-            <a:r>
+                <a:latin typeface="Arial"/>
+                <a:ea typeface="Arial"/>
+                <a:cs typeface="Arial"/>
+              </a:defRPr>
+            </a:pPr>
+            <a:r>
+              <a:rPr sz="1650">
+                <a:solidFill>
+                  <a:srgbClr val="000000"/>
+                </a:solidFill>
+                <a:latin typeface="Arial"/>
+                <a:ea typeface="Arial"/>
+                <a:cs typeface="Arial"/>
+              </a:rPr>
               <a:t>Certify contracts and timing
 Prove quality, 6x capacity, cost, and failure drills</a:t>
             </a:r>
@@ -8853,16 +9670,25 @@
           <a:lstStyle xmlns:a="http://schemas.openxmlformats.org/drawingml/2006/main"/>
           <a:p xmlns:a="http://schemas.openxmlformats.org/drawingml/2006/main">
             <a:pPr algn="l">
+              <a:buNone/>
               <a:defRPr sz="2400" b="1">
                 <a:solidFill>
                   <a:srgbClr val="000000"/>
                 </a:solidFill>
-                <a:latin typeface="Helvetica Neue"/>
-                <a:ea typeface="Helvetica Neue"/>
-                <a:cs typeface="Helvetica Neue"/>
-              </a:defRPr>
-            </a:pPr>
-            <a:r>
+                <a:latin typeface="Arial"/>
+                <a:ea typeface="Arial"/>
+                <a:cs typeface="Arial"/>
+              </a:defRPr>
+            </a:pPr>
+            <a:r>
+              <a:rPr sz="2400" b="1">
+                <a:solidFill>
+                  <a:srgbClr val="000000"/>
+                </a:solidFill>
+                <a:latin typeface="Arial"/>
+                <a:ea typeface="Arial"/>
+                <a:cs typeface="Arial"/>
+              </a:rPr>
               <a:t>Shadow ≥4 weeks</a:t>
             </a:r>
           </a:p>
@@ -8898,16 +9724,25 @@
           <a:lstStyle xmlns:a="http://schemas.openxmlformats.org/drawingml/2006/main"/>
           <a:p xmlns:a="http://schemas.openxmlformats.org/drawingml/2006/main">
             <a:pPr algn="l">
+              <a:buNone/>
               <a:defRPr sz="1650">
                 <a:solidFill>
                   <a:srgbClr val="000000"/>
                 </a:solidFill>
-                <a:latin typeface="Helvetica Neue"/>
-                <a:ea typeface="Helvetica Neue"/>
-                <a:cs typeface="Helvetica Neue"/>
-              </a:defRPr>
-            </a:pPr>
-            <a:r>
+                <a:latin typeface="Arial"/>
+                <a:ea typeface="Arial"/>
+                <a:cs typeface="Arial"/>
+              </a:defRPr>
+            </a:pPr>
+            <a:r>
+              <a:rPr sz="1650">
+                <a:solidFill>
+                  <a:srgbClr val="000000"/>
+                </a:solidFill>
+                <a:latin typeface="Arial"/>
+                <a:ea typeface="Arial"/>
+                <a:cs typeface="Arial"/>
+              </a:rPr>
               <a:t>Zero MERLIN writes
 Representative promotions
 Promotion evidence required</a:t>
@@ -8980,16 +9815,25 @@
           <a:lstStyle xmlns:a="http://schemas.openxmlformats.org/drawingml/2006/main"/>
           <a:p xmlns:a="http://schemas.openxmlformats.org/drawingml/2006/main">
             <a:pPr algn="l">
+              <a:buNone/>
               <a:defRPr sz="2400" b="1">
                 <a:solidFill>
                   <a:srgbClr val="000000"/>
                 </a:solidFill>
-                <a:latin typeface="Helvetica Neue"/>
-                <a:ea typeface="Helvetica Neue"/>
-                <a:cs typeface="Helvetica Neue"/>
-              </a:defRPr>
-            </a:pPr>
-            <a:r>
+                <a:latin typeface="Arial"/>
+                <a:ea typeface="Arial"/>
+                <a:cs typeface="Arial"/>
+              </a:defRPr>
+            </a:pPr>
+            <a:r>
+              <a:rPr sz="2400" b="1">
+                <a:solidFill>
+                  <a:srgbClr val="000000"/>
+                </a:solidFill>
+                <a:latin typeface="Arial"/>
+                <a:ea typeface="Arial"/>
+                <a:cs typeface="Arial"/>
+              </a:rPr>
               <a:t>Pilot → scale</a:t>
             </a:r>
           </a:p>
@@ -9025,16 +9869,25 @@
           <a:lstStyle xmlns:a="http://schemas.openxmlformats.org/drawingml/2006/main"/>
           <a:p xmlns:a="http://schemas.openxmlformats.org/drawingml/2006/main">
             <a:pPr algn="l">
+              <a:buNone/>
               <a:defRPr sz="1650">
                 <a:solidFill>
                   <a:srgbClr val="000000"/>
                 </a:solidFill>
-                <a:latin typeface="Helvetica Neue"/>
-                <a:ea typeface="Helvetica Neue"/>
-                <a:cs typeface="Helvetica Neue"/>
-              </a:defRPr>
-            </a:pPr>
-            <a:r>
+                <a:latin typeface="Arial"/>
+                <a:ea typeface="Arial"/>
+                <a:cs typeface="Arial"/>
+              </a:defRPr>
+            </a:pPr>
+            <a:r>
+              <a:rPr sz="1650">
+                <a:solidFill>
+                  <a:srgbClr val="000000"/>
+                </a:solidFill>
+                <a:latin typeface="Arial"/>
+                <a:ea typeface="Arial"/>
+                <a:cs typeface="Arial"/>
+              </a:rPr>
               <a:t>20 stores; 2 low-risk categories
 ≤min(5,000, measured cap) rows
 ≤100 reviews / night</a:t>
@@ -9107,16 +9960,25 @@
           <a:lstStyle xmlns:a="http://schemas.openxmlformats.org/drawingml/2006/main"/>
           <a:p xmlns:a="http://schemas.openxmlformats.org/drawingml/2006/main">
             <a:pPr algn="ctr">
+              <a:buNone/>
               <a:defRPr sz="1800" b="1">
                 <a:solidFill>
                   <a:srgbClr val="3D8DFF"/>
                 </a:solidFill>
-                <a:latin typeface="Helvetica Neue"/>
-                <a:ea typeface="Helvetica Neue"/>
-                <a:cs typeface="Helvetica Neue"/>
-              </a:defRPr>
-            </a:pPr>
-            <a:r>
+                <a:latin typeface="Arial"/>
+                <a:ea typeface="Arial"/>
+                <a:cs typeface="Arial"/>
+              </a:defRPr>
+            </a:pPr>
+            <a:r>
+              <a:rPr sz="1800" b="1">
+                <a:solidFill>
+                  <a:srgbClr val="3D8DFF"/>
+                </a:solidFill>
+                <a:latin typeface="Arial"/>
+                <a:ea typeface="Arial"/>
+                <a:cs typeface="Arial"/>
+              </a:rPr>
               <a:t>deny-default epoch  →  short permit  →  independent SAP revoke  →  exact-row cleanup</a:t>
             </a:r>
           </a:p>
@@ -9220,16 +10082,25 @@
           <a:lstStyle xmlns:a="http://schemas.openxmlformats.org/drawingml/2006/main"/>
           <a:p xmlns:a="http://schemas.openxmlformats.org/drawingml/2006/main">
             <a:pPr algn="l">
+              <a:buNone/>
               <a:defRPr sz="1650" b="1">
                 <a:solidFill>
                   <a:srgbClr val="000000"/>
                 </a:solidFill>
-                <a:latin typeface="Helvetica Neue"/>
-                <a:ea typeface="Helvetica Neue"/>
-                <a:cs typeface="Helvetica Neue"/>
-              </a:defRPr>
-            </a:pPr>
-            <a:r>
+                <a:latin typeface="Arial"/>
+                <a:ea typeface="Arial"/>
+                <a:cs typeface="Arial"/>
+              </a:defRPr>
+            </a:pPr>
+            <a:r>
+              <a:rPr sz="1650" b="1">
+                <a:solidFill>
+                  <a:srgbClr val="000000"/>
+                </a:solidFill>
+                <a:latin typeface="Arial"/>
+                <a:ea typeface="Arial"/>
+                <a:cs typeface="Arial"/>
+              </a:rPr>
               <a:t>Certify</a:t>
             </a:r>
           </a:p>
@@ -9300,16 +10171,25 @@
           <a:lstStyle xmlns:a="http://schemas.openxmlformats.org/drawingml/2006/main"/>
           <a:p xmlns:a="http://schemas.openxmlformats.org/drawingml/2006/main">
             <a:pPr algn="l">
+              <a:buNone/>
               <a:defRPr sz="1650" b="1">
                 <a:solidFill>
                   <a:srgbClr val="000000"/>
                 </a:solidFill>
-                <a:latin typeface="Helvetica Neue"/>
-                <a:ea typeface="Helvetica Neue"/>
-                <a:cs typeface="Helvetica Neue"/>
-              </a:defRPr>
-            </a:pPr>
-            <a:r>
+                <a:latin typeface="Arial"/>
+                <a:ea typeface="Arial"/>
+                <a:cs typeface="Arial"/>
+              </a:defRPr>
+            </a:pPr>
+            <a:r>
+              <a:rPr sz="1650" b="1">
+                <a:solidFill>
+                  <a:srgbClr val="000000"/>
+                </a:solidFill>
+                <a:latin typeface="Arial"/>
+                <a:ea typeface="Arial"/>
+                <a:cs typeface="Arial"/>
+              </a:rPr>
               <a:t>Prove</a:t>
             </a:r>
           </a:p>
@@ -9380,16 +10260,25 @@
           <a:lstStyle xmlns:a="http://schemas.openxmlformats.org/drawingml/2006/main"/>
           <a:p xmlns:a="http://schemas.openxmlformats.org/drawingml/2006/main">
             <a:pPr algn="l">
+              <a:buNone/>
               <a:defRPr sz="1650" b="1">
                 <a:solidFill>
                   <a:srgbClr val="000000"/>
                 </a:solidFill>
-                <a:latin typeface="Helvetica Neue"/>
-                <a:ea typeface="Helvetica Neue"/>
-                <a:cs typeface="Helvetica Neue"/>
-              </a:defRPr>
-            </a:pPr>
-            <a:r>
+                <a:latin typeface="Arial"/>
+                <a:ea typeface="Arial"/>
+                <a:cs typeface="Arial"/>
+              </a:defRPr>
+            </a:pPr>
+            <a:r>
+              <a:rPr sz="1650" b="1">
+                <a:solidFill>
+                  <a:srgbClr val="000000"/>
+                </a:solidFill>
+                <a:latin typeface="Arial"/>
+                <a:ea typeface="Arial"/>
+                <a:cs typeface="Arial"/>
+              </a:rPr>
               <a:t>Bound + scale</a:t>
             </a:r>
           </a:p>
@@ -9411,8 +10300,8 @@
         </p:nvSpPr>
         <p:spPr>
           <a:xfrm xmlns:a="http://schemas.openxmlformats.org/drawingml/2006/main">
-            <a:off x="400050" y="5791200"/>
-            <a:ext cx="11391900" cy="361950"/>
+            <a:off x="400050" y="5695950"/>
+            <a:ext cx="11391900" cy="457200"/>
           </a:xfrm>
           <a:prstGeom xmlns:a="http://schemas.openxmlformats.org/drawingml/2006/main" prst="rect">
             <a:avLst/>
@@ -9425,16 +10314,25 @@
           <a:lstStyle xmlns:a="http://schemas.openxmlformats.org/drawingml/2006/main"/>
           <a:p xmlns:a="http://schemas.openxmlformats.org/drawingml/2006/main">
             <a:pPr algn="ctr">
+              <a:buNone/>
               <a:defRPr sz="1650" b="1">
                 <a:solidFill>
                   <a:srgbClr val="3D8DFF"/>
                 </a:solidFill>
-                <a:latin typeface="Helvetica Neue"/>
-                <a:ea typeface="Helvetica Neue"/>
-                <a:cs typeface="Helvetica Neue"/>
-              </a:defRPr>
-            </a:pPr>
-            <a:r>
+                <a:latin typeface="Arial"/>
+                <a:ea typeface="Arial"/>
+                <a:cs typeface="Arial"/>
+              </a:defRPr>
+            </a:pPr>
+            <a:r>
+              <a:rPr sz="1650" b="1">
+                <a:solidFill>
+                  <a:srgbClr val="3D8DFF"/>
+                </a:solidFill>
+                <a:latin typeface="Arial"/>
+                <a:ea typeface="Arial"/>
+                <a:cs typeface="Arial"/>
+              </a:rPr>
               <a:t>Kill proof: acknowledge ≤30 s  •  reject new writes ≤60 s  •  verified safe ≤5 min  —  Remove the sidecar and MERLIN still orders.</a:t>
             </a:r>
           </a:p>
@@ -9470,16 +10368,25 @@
           <a:lstStyle xmlns:a="http://schemas.openxmlformats.org/drawingml/2006/main"/>
           <a:p xmlns:a="http://schemas.openxmlformats.org/drawingml/2006/main">
             <a:pPr algn="l">
+              <a:buNone/>
               <a:defRPr sz="1200">
                 <a:solidFill>
                   <a:srgbClr val="586174"/>
                 </a:solidFill>
-                <a:latin typeface="Helvetica Neue"/>
-                <a:ea typeface="Helvetica Neue"/>
-                <a:cs typeface="Helvetica Neue"/>
-              </a:defRPr>
-            </a:pPr>
-            <a:r>
+                <a:latin typeface="Arial"/>
+                <a:ea typeface="Arial"/>
+                <a:cs typeface="Arial"/>
+              </a:defRPr>
+            </a:pPr>
+            <a:r>
+              <a:rPr sz="1200">
+                <a:solidFill>
+                  <a:srgbClr val="586174"/>
+                </a:solidFill>
+                <a:latin typeface="Arial"/>
+                <a:ea typeface="Arial"/>
+                <a:cs typeface="Arial"/>
+              </a:rPr>
               <a:t>Owner: TRẦN TRỌNG PHÚ (197320)</a:t>
             </a:r>
           </a:p>
@@ -9515,16 +10422,25 @@
           <a:lstStyle xmlns:a="http://schemas.openxmlformats.org/drawingml/2006/main"/>
           <a:p xmlns:a="http://schemas.openxmlformats.org/drawingml/2006/main">
             <a:pPr algn="l">
+              <a:buNone/>
               <a:defRPr sz="1350">
                 <a:solidFill>
                   <a:srgbClr val="586174"/>
                 </a:solidFill>
-                <a:latin typeface="Helvetica Neue"/>
-                <a:ea typeface="Helvetica Neue"/>
-                <a:cs typeface="Helvetica Neue"/>
-              </a:defRPr>
-            </a:pPr>
-            <a:r>
+                <a:latin typeface="Arial"/>
+                <a:ea typeface="Arial"/>
+                <a:cs typeface="Arial"/>
+              </a:defRPr>
+            </a:pPr>
+            <a:r>
+              <a:rPr sz="1350">
+                <a:solidFill>
+                  <a:srgbClr val="586174"/>
+                </a:solidFill>
+                <a:latin typeface="Arial"/>
+                <a:ea typeface="Arial"/>
+                <a:cs typeface="Arial"/>
+              </a:rPr>
               <a:t>Variant B rollout + kill switch</a:t>
             </a:r>
           </a:p>
@@ -9560,16 +10476,25 @@
           <a:lstStyle xmlns:a="http://schemas.openxmlformats.org/drawingml/2006/main"/>
           <a:p xmlns:a="http://schemas.openxmlformats.org/drawingml/2006/main">
             <a:pPr algn="r">
+              <a:buNone/>
               <a:defRPr sz="1350">
                 <a:solidFill>
                   <a:srgbClr val="000000"/>
                 </a:solidFill>
-                <a:latin typeface="Helvetica Neue"/>
-                <a:ea typeface="Helvetica Neue"/>
-                <a:cs typeface="Helvetica Neue"/>
-              </a:defRPr>
-            </a:pPr>
-            <a:r>
+                <a:latin typeface="Arial"/>
+                <a:ea typeface="Arial"/>
+                <a:cs typeface="Arial"/>
+              </a:defRPr>
+            </a:pPr>
+            <a:r>
+              <a:rPr sz="1350">
+                <a:solidFill>
+                  <a:srgbClr val="000000"/>
+                </a:solidFill>
+                <a:latin typeface="Arial"/>
+                <a:ea typeface="Arial"/>
+                <a:cs typeface="Arial"/>
+              </a:rPr>
               <a:t>8</a:t>
             </a:r>
           </a:p>
